--- a/design/malaysia-study-live/IM말레이시아_입학안내문_2027_통합판.pptx
+++ b/design/malaysia-study-live/IM말레이시아_입학안내문_2027_통합판.pptx
@@ -22387,7 +22387,7 @@
                 <a:ea typeface="맑은 고딕" pitchFamily="34" charset="-122"/>
                 <a:cs typeface="맑은 고딕" pitchFamily="34" charset="-120"/>
               </a:rPr>
-              <a:t>학사·파운데이션 인테이크 확정</a:t>
+              <a:t>학과별 지원 마감일</a:t>
             </a:r>
             <a:endParaRPr lang="en-US" sz="1300" dirty="0"/>
           </a:p>
@@ -22429,7 +22429,7 @@
                 <a:ea typeface="맑은 고딕" pitchFamily="34" charset="-122"/>
                 <a:cs typeface="맑은 고딕" pitchFamily="34" charset="-120"/>
               </a:rPr>
-              <a:t>지망 학과 기준으로 월·마감일을 학교에 재확인</a:t>
+              <a:t>입학 시기는 확인 완료. 학과별 원서 마감일만 추가 확인</a:t>
             </a:r>
             <a:endParaRPr lang="en-US" sz="1100" dirty="0"/>
           </a:p>
@@ -23279,8 +23279,8 @@
         </p:nvSpPr>
         <p:spPr>
           <a:xfrm>
-            <a:off x="640080" y="5943600"/>
-            <a:ext cx="10911535" cy="310896"/>
+            <a:off x="640080" y="5888736"/>
+            <a:ext cx="10911535" cy="438912"/>
           </a:xfrm>
           <a:prstGeom prst="rect">
             <a:avLst/>
@@ -23294,7 +23294,7 @@
           <a:p>
             <a:pPr algn="l" indent="0" marL="0">
               <a:lnSpc>
-                <a:spcPct val="122000"/>
+                <a:spcPct val="130000"/>
               </a:lnSpc>
               <a:buNone/>
             </a:pPr>
@@ -23307,7 +23307,7 @@
                 <a:ea typeface="맑은 고딕" pitchFamily="34" charset="-122"/>
                 <a:cs typeface="맑은 고딕" pitchFamily="34" charset="-120"/>
               </a:rPr>
-              <a:t>학비·순위·인테이크 등 일부 수치는 원본 안내문과 3자 집계 자료에서 가져왔습니다. 대외 배포 전 위 6개 항목을 확인해 확정하십시오.</a:t>
+              <a:t>학사·파운데이션 입학 시기와 과정 구성은 학교 문의로 확인된 내용입니다. 학비·순위 등 나머지 수치는 원본 안내문과 3자 집계 자료 기준이므로, 대외 배포 전 위 6개 항목을 확정하십시오.</a:t>
             </a:r>
             <a:endParaRPr lang="en-US" sz="1100" dirty="0"/>
           </a:p>
@@ -33735,6 +33735,70 @@
         </p:nvSpPr>
         <p:spPr>
           <a:xfrm>
+            <a:off x="9850831" y="548640"/>
+            <a:ext cx="1700784" cy="329184"/>
+          </a:xfrm>
+          <a:prstGeom prst="roundRect">
+            <a:avLst>
+              <a:gd name="adj" fmla="val 13889"/>
+            </a:avLst>
+          </a:prstGeom>
+          <a:solidFill>
+            <a:srgbClr val="134744"/>
+          </a:solidFill>
+          <a:ln/>
+        </p:spPr>
+      </p:sp>
+      <p:sp>
+        <p:nvSpPr>
+          <p:cNvPr id="8" name="Text 6"/>
+          <p:cNvSpPr txBox="1"/>
+          <p:nvPr/>
+        </p:nvSpPr>
+        <p:spPr>
+          <a:xfrm>
+            <a:off x="9850831" y="548640"/>
+            <a:ext cx="1700784" cy="329184"/>
+          </a:xfrm>
+          <a:prstGeom prst="rect">
+            <a:avLst/>
+          </a:prstGeom>
+          <a:noFill/>
+          <a:ln/>
+        </p:spPr>
+        <p:txBody>
+          <a:bodyPr wrap="square" lIns="0" tIns="0" rIns="0" bIns="0" rtlCol="0" anchor="ctr"/>
+          <a:lstStyle/>
+          <a:p>
+            <a:pPr algn="ctr" indent="0" marL="0">
+              <a:lnSpc>
+                <a:spcPct val="122000"/>
+              </a:lnSpc>
+              <a:buNone/>
+            </a:pPr>
+            <a:r>
+              <a:rPr lang="en-US" sz="1100" b="1" dirty="0">
+                <a:solidFill>
+                  <a:srgbClr val="C08A2E"/>
+                </a:solidFill>
+                <a:latin typeface="맑은 고딕" pitchFamily="34" charset="0"/>
+                <a:ea typeface="맑은 고딕" pitchFamily="34" charset="-122"/>
+                <a:cs typeface="맑은 고딕" pitchFamily="34" charset="-120"/>
+              </a:rPr>
+              <a:t>학교 확인 완료</a:t>
+            </a:r>
+            <a:endParaRPr lang="en-US" sz="1100" dirty="0"/>
+          </a:p>
+        </p:txBody>
+      </p:sp>
+      <p:sp>
+        <p:nvSpPr>
+          <p:cNvPr id="9" name="Shape 7"/>
+          <p:cNvSpPr/>
+          <p:nvPr/>
+        </p:nvSpPr>
+        <p:spPr>
+          <a:xfrm>
             <a:off x="640080" y="1828800"/>
             <a:ext cx="5358384" cy="2468880"/>
           </a:xfrm>
@@ -33751,7 +33815,7 @@
       </p:sp>
       <p:sp>
         <p:nvSpPr>
-          <p:cNvPr id="8" name="Text 6"/>
+          <p:cNvPr id="10" name="Text 8"/>
           <p:cNvSpPr txBox="1"/>
           <p:nvPr/>
         </p:nvSpPr>
@@ -33793,7 +33857,7 @@
       </p:sp>
       <p:sp>
         <p:nvSpPr>
-          <p:cNvPr id="9" name="Text 7"/>
+          <p:cNvPr id="11" name="Text 9"/>
           <p:cNvSpPr txBox="1"/>
           <p:nvPr/>
         </p:nvSpPr>
@@ -33835,7 +33899,7 @@
       </p:sp>
       <p:sp>
         <p:nvSpPr>
-          <p:cNvPr id="10" name="Shape 8"/>
+          <p:cNvPr id="12" name="Shape 10"/>
           <p:cNvSpPr/>
           <p:nvPr/>
         </p:nvSpPr>
@@ -33857,7 +33921,7 @@
       </p:sp>
       <p:sp>
         <p:nvSpPr>
-          <p:cNvPr id="11" name="Text 9"/>
+          <p:cNvPr id="13" name="Text 11"/>
           <p:cNvSpPr txBox="1"/>
           <p:nvPr/>
         </p:nvSpPr>
@@ -33899,7 +33963,7 @@
       </p:sp>
       <p:sp>
         <p:nvSpPr>
-          <p:cNvPr id="12" name="Shape 10"/>
+          <p:cNvPr id="14" name="Shape 12"/>
           <p:cNvSpPr/>
           <p:nvPr/>
         </p:nvSpPr>
@@ -33921,7 +33985,7 @@
       </p:sp>
       <p:sp>
         <p:nvSpPr>
-          <p:cNvPr id="13" name="Text 11"/>
+          <p:cNvPr id="15" name="Text 13"/>
           <p:cNvSpPr txBox="1"/>
           <p:nvPr/>
         </p:nvSpPr>
@@ -33963,7 +34027,7 @@
       </p:sp>
       <p:sp>
         <p:nvSpPr>
-          <p:cNvPr id="14" name="Shape 12"/>
+          <p:cNvPr id="16" name="Shape 14"/>
           <p:cNvSpPr/>
           <p:nvPr/>
         </p:nvSpPr>
@@ -33985,7 +34049,7 @@
       </p:sp>
       <p:sp>
         <p:nvSpPr>
-          <p:cNvPr id="15" name="Text 13"/>
+          <p:cNvPr id="17" name="Text 15"/>
           <p:cNvSpPr txBox="1"/>
           <p:nvPr/>
         </p:nvSpPr>
@@ -34027,7 +34091,7 @@
       </p:sp>
       <p:sp>
         <p:nvSpPr>
-          <p:cNvPr id="16" name="Text 14"/>
+          <p:cNvPr id="18" name="Text 16"/>
           <p:cNvSpPr txBox="1"/>
           <p:nvPr/>
         </p:nvSpPr>
@@ -34069,7 +34133,7 @@
       </p:sp>
       <p:sp>
         <p:nvSpPr>
-          <p:cNvPr id="17" name="Text 15"/>
+          <p:cNvPr id="19" name="Text 17"/>
           <p:cNvSpPr txBox="1"/>
           <p:nvPr/>
         </p:nvSpPr>
@@ -34131,7 +34195,7 @@
       </p:sp>
       <p:sp>
         <p:nvSpPr>
-          <p:cNvPr id="18" name="Shape 16"/>
+          <p:cNvPr id="20" name="Shape 18"/>
           <p:cNvSpPr/>
           <p:nvPr/>
         </p:nvSpPr>
@@ -34153,7 +34217,7 @@
       </p:sp>
       <p:sp>
         <p:nvSpPr>
-          <p:cNvPr id="19" name="Text 17"/>
+          <p:cNvPr id="21" name="Text 19"/>
           <p:cNvSpPr txBox="1"/>
           <p:nvPr/>
         </p:nvSpPr>
@@ -34195,7 +34259,7 @@
       </p:sp>
       <p:sp>
         <p:nvSpPr>
-          <p:cNvPr id="20" name="Text 18"/>
+          <p:cNvPr id="22" name="Text 20"/>
           <p:cNvSpPr txBox="1"/>
           <p:nvPr/>
         </p:nvSpPr>
@@ -34237,7 +34301,7 @@
       </p:sp>
       <p:sp>
         <p:nvSpPr>
-          <p:cNvPr id="21" name="Shape 19"/>
+          <p:cNvPr id="23" name="Shape 21"/>
           <p:cNvSpPr/>
           <p:nvPr/>
         </p:nvSpPr>
@@ -34259,7 +34323,7 @@
       </p:sp>
       <p:sp>
         <p:nvSpPr>
-          <p:cNvPr id="22" name="Text 20"/>
+          <p:cNvPr id="24" name="Text 22"/>
           <p:cNvSpPr txBox="1"/>
           <p:nvPr/>
         </p:nvSpPr>
@@ -34301,7 +34365,7 @@
       </p:sp>
       <p:sp>
         <p:nvSpPr>
-          <p:cNvPr id="23" name="Shape 21"/>
+          <p:cNvPr id="25" name="Shape 23"/>
           <p:cNvSpPr/>
           <p:nvPr/>
         </p:nvSpPr>
@@ -34323,7 +34387,7 @@
       </p:sp>
       <p:sp>
         <p:nvSpPr>
-          <p:cNvPr id="24" name="Text 22"/>
+          <p:cNvPr id="26" name="Text 24"/>
           <p:cNvSpPr txBox="1"/>
           <p:nvPr/>
         </p:nvSpPr>
@@ -34365,7 +34429,7 @@
       </p:sp>
       <p:sp>
         <p:nvSpPr>
-          <p:cNvPr id="25" name="Shape 23"/>
+          <p:cNvPr id="27" name="Shape 25"/>
           <p:cNvSpPr/>
           <p:nvPr/>
         </p:nvSpPr>
@@ -34387,7 +34451,7 @@
       </p:sp>
       <p:sp>
         <p:nvSpPr>
-          <p:cNvPr id="26" name="Text 24"/>
+          <p:cNvPr id="28" name="Text 26"/>
           <p:cNvSpPr txBox="1"/>
           <p:nvPr/>
         </p:nvSpPr>
@@ -34429,7 +34493,7 @@
       </p:sp>
       <p:sp>
         <p:nvSpPr>
-          <p:cNvPr id="27" name="Text 25"/>
+          <p:cNvPr id="29" name="Text 27"/>
           <p:cNvSpPr txBox="1"/>
           <p:nvPr/>
         </p:nvSpPr>
@@ -34471,7 +34535,7 @@
       </p:sp>
       <p:sp>
         <p:nvSpPr>
-          <p:cNvPr id="28" name="Text 26"/>
+          <p:cNvPr id="30" name="Text 28"/>
           <p:cNvSpPr txBox="1"/>
           <p:nvPr/>
         </p:nvSpPr>
@@ -34513,7 +34577,7 @@
       </p:sp>
       <p:sp>
         <p:nvSpPr>
-          <p:cNvPr id="29" name="Shape 27"/>
+          <p:cNvPr id="31" name="Shape 29"/>
           <p:cNvSpPr/>
           <p:nvPr/>
         </p:nvSpPr>
@@ -34535,7 +34599,7 @@
       </p:sp>
       <p:sp>
         <p:nvSpPr>
-          <p:cNvPr id="30" name="Text 28"/>
+          <p:cNvPr id="32" name="Text 30"/>
           <p:cNvSpPr txBox="1"/>
           <p:nvPr/>
         </p:nvSpPr>
@@ -34577,7 +34641,7 @@
       </p:sp>
       <p:sp>
         <p:nvSpPr>
-          <p:cNvPr id="31" name="Text 29"/>
+          <p:cNvPr id="33" name="Text 31"/>
           <p:cNvSpPr txBox="1"/>
           <p:nvPr/>
         </p:nvSpPr>
@@ -34619,7 +34683,7 @@
       </p:sp>
       <p:sp>
         <p:nvSpPr>
-          <p:cNvPr id="32" name="Shape 30"/>
+          <p:cNvPr id="34" name="Shape 32"/>
           <p:cNvSpPr/>
           <p:nvPr/>
         </p:nvSpPr>
@@ -34641,7 +34705,7 @@
       </p:sp>
       <p:sp>
         <p:nvSpPr>
-          <p:cNvPr id="33" name="Text 31"/>
+          <p:cNvPr id="35" name="Text 33"/>
           <p:cNvSpPr txBox="1"/>
           <p:nvPr/>
         </p:nvSpPr>
@@ -34683,7 +34747,7 @@
       </p:sp>
       <p:sp>
         <p:nvSpPr>
-          <p:cNvPr id="34" name="Text 32"/>
+          <p:cNvPr id="36" name="Text 34"/>
           <p:cNvSpPr txBox="1"/>
           <p:nvPr/>
         </p:nvSpPr>
@@ -34725,7 +34789,7 @@
       </p:sp>
       <p:sp>
         <p:nvSpPr>
-          <p:cNvPr id="35" name="Text 33"/>
+          <p:cNvPr id="37" name="Text 35"/>
           <p:cNvSpPr txBox="1"/>
           <p:nvPr/>
         </p:nvSpPr>
@@ -34759,7 +34823,7 @@
                 <a:ea typeface="맑은 고딕" pitchFamily="34" charset="-122"/>
                 <a:cs typeface="맑은 고딕" pitchFamily="34" charset="-120"/>
               </a:rPr>
-              <a:t>※ 인테이크 월은 학과·과정별로 달라질 수 있습니다. 지망 학과 기준으로 학교에 최종 확인하십시오.</a:t>
+              <a:t>※ 학사·파운데이션 입학 시기는 두 학교에 직접 문의해 확인한 내용입니다.</a:t>
             </a:r>
             <a:endParaRPr lang="en-US" sz="900" dirty="0"/>
           </a:p>

--- a/design/malaysia-study-live/IM말레이시아_입학안내문_2027_통합판.pptx
+++ b/design/malaysia-study-live/IM말레이시아_입학안내문_2027_통합판.pptx
@@ -697,7 +697,7 @@
           <a:p>
             <a:r>
               <a:rPr lang="en-US" dirty="0"/>
-              <a:t>학비는 호텔경영 3년 기준 총 4,510만 원 수준입니다. 미국 편입 경로는 합격 보장이 아니라는 점을 반드시 안내해야 합니다.</a:t>
+              <a:t>표를 RM 기준으로 통일했습니다. 약학 학비는 학교 요금표에서 받아 채워 넣으십시오. 공대·약대 지망자는 5년 행을 보여 주는 것이 정확합니다.</a:t>
             </a:r>
             <a:endParaRPr lang="en-US" dirty="0"/>
           </a:p>
@@ -873,7 +873,7 @@
           <a:p>
             <a:r>
               <a:rPr lang="en-US" dirty="0"/>
-              <a:t>선웨이의 랭커스터 복수 학위와 ASU 파트너십은 공식 자료로 확인됩니다.</a:t>
+              <a:t>선웨이 경영계열만 학교가 달러로 표기합니다. 환산값임을 밝혀 두었습니다. 공대 지망자는 5년 행이 실제 예산입니다.</a:t>
             </a:r>
             <a:endParaRPr lang="en-US" dirty="0"/>
           </a:p>
@@ -4832,7 +4832,7 @@
                 <a:ea typeface="맑은 고딕" pitchFamily="34" charset="-122"/>
                 <a:cs typeface="맑은 고딕" pitchFamily="34" charset="-120"/>
               </a:rPr>
-              <a:t>국제학생 기준 (2026)</a:t>
+              <a:t>국제학생 기준 · 모든 금액은 링깃(RM)과 원화로 통일했습니다</a:t>
             </a:r>
             <a:endParaRPr lang="en-US" sz="1300" dirty="0"/>
           </a:p>
@@ -4854,19 +4854,20 @@
         </p:nvGraphicFramePr>
         <p:xfrm>
           <a:off x="640080" y="1828800"/>
-          <a:ext cx="6309360" cy="914400"/>
+          <a:ext cx="10911535" cy="914400"/>
         </p:xfrm>
         <a:graphic>
           <a:graphicData uri="http://schemas.openxmlformats.org/drawingml/2006/table">
             <a:tbl>
               <a:tblPr/>
               <a:tblGrid>
-                <a:gridCol w="2011680"/>
-                <a:gridCol w="1554480"/>
-                <a:gridCol w="1463040"/>
-                <a:gridCol w="1280160"/>
+                <a:gridCol w="2468880"/>
+                <a:gridCol w="1005840"/>
+                <a:gridCol w="2377440"/>
+                <a:gridCol w="2560320"/>
+                <a:gridCol w="2499055"/>
               </a:tblGrid>
-              <a:tr h="457200">
+              <a:tr h="438912">
                 <a:tc>
                   <a:txBody>
                     <a:bodyPr/>
@@ -4885,6 +4886,74 @@
                           <a:cs typeface="맑은 고딕" pitchFamily="34" charset="-120"/>
                         </a:rPr>
                         <a:t>과정</a:t>
+                      </a:r>
+                      <a:endParaRPr lang="en-US" sz="1250" dirty="0">
+                        <a:latin typeface="맑은 고딕" charset="0"/>
+                        <a:ea typeface="맑은 고딕" charset="0"/>
+                        <a:cs typeface="맑은 고딕" charset="0"/>
+                      </a:endParaRPr>
+                    </a:p>
+                  </a:txBody>
+                  <a:tcPr marL="88900" marR="88900" marT="50800" marB="50800" anchor="ctr">
+                    <a:lnL w="6350" cap="flat" cmpd="sng" algn="ctr">
+                      <a:solidFill>
+                        <a:srgbClr val="DCD6C9"/>
+                      </a:solidFill>
+                      <a:prstDash val="solid"/>
+                      <a:round/>
+                      <a:headEnd type="none" w="med" len="med"/>
+                      <a:tailEnd type="none" w="med" len="med"/>
+                    </a:lnL>
+                    <a:lnR w="6350" cap="flat" cmpd="sng" algn="ctr">
+                      <a:solidFill>
+                        <a:srgbClr val="DCD6C9"/>
+                      </a:solidFill>
+                      <a:prstDash val="solid"/>
+                      <a:round/>
+                      <a:headEnd type="none" w="med" len="med"/>
+                      <a:tailEnd type="none" w="med" len="med"/>
+                    </a:lnR>
+                    <a:lnT w="6350" cap="flat" cmpd="sng" algn="ctr">
+                      <a:solidFill>
+                        <a:srgbClr val="DCD6C9"/>
+                      </a:solidFill>
+                      <a:prstDash val="solid"/>
+                      <a:round/>
+                      <a:headEnd type="none" w="med" len="med"/>
+                      <a:tailEnd type="none" w="med" len="med"/>
+                    </a:lnT>
+                    <a:lnB w="6350" cap="flat" cmpd="sng" algn="ctr">
+                      <a:solidFill>
+                        <a:srgbClr val="DCD6C9"/>
+                      </a:solidFill>
+                      <a:prstDash val="solid"/>
+                      <a:round/>
+                      <a:headEnd type="none" w="med" len="med"/>
+                      <a:tailEnd type="none" w="med" len="med"/>
+                    </a:lnB>
+                    <a:solidFill>
+                      <a:srgbClr val="134744"/>
+                    </a:solidFill>
+                  </a:tcPr>
+                </a:tc>
+                <a:tc>
+                  <a:txBody>
+                    <a:bodyPr/>
+                    <a:lstStyle/>
+                    <a:p>
+                      <a:pPr indent="0" marL="0">
+                        <a:buNone/>
+                      </a:pPr>
+                      <a:r>
+                        <a:rPr lang="en-US" sz="1250" b="1" dirty="0">
+                          <a:solidFill>
+                            <a:srgbClr val="FFFFFF"/>
+                          </a:solidFill>
+                          <a:latin typeface="맑은 고딕" pitchFamily="34" charset="0"/>
+                          <a:ea typeface="맑은 고딕" pitchFamily="34" charset="-122"/>
+                          <a:cs typeface="맑은 고딕" pitchFamily="34" charset="-120"/>
+                        </a:rPr>
+                        <a:t>기간</a:t>
                       </a:r>
                       <a:endParaRPr lang="en-US" sz="1250" dirty="0">
                         <a:latin typeface="맑은 고딕" charset="0"/>
@@ -5020,7 +5089,7 @@
                           <a:ea typeface="맑은 고딕" pitchFamily="34" charset="-122"/>
                           <a:cs typeface="맑은 고딕" pitchFamily="34" charset="-120"/>
                         </a:rPr>
-                        <a:t>원화 환산</a:t>
+                        <a:t>총 학비 (원화)</a:t>
                       </a:r>
                       <a:endParaRPr lang="en-US" sz="1250" dirty="0">
                         <a:latin typeface="맑은 고딕" charset="0"/>
@@ -5088,7 +5157,7 @@
                           <a:ea typeface="맑은 고딕" pitchFamily="34" charset="-122"/>
                           <a:cs typeface="맑은 고딕" pitchFamily="34" charset="-120"/>
                         </a:rPr>
-                        <a:t>연간</a:t>
+                        <a:t>연간 (원화)</a:t>
                       </a:r>
                       <a:endParaRPr lang="en-US" sz="1250" dirty="0">
                         <a:latin typeface="맑은 고딕" charset="0"/>
@@ -5140,7 +5209,7 @@
                   </a:tcPr>
                 </a:tc>
               </a:tr>
-              <a:tr h="457200">
+              <a:tr h="438912">
                 <a:tc>
                   <a:txBody>
                     <a:bodyPr/>
@@ -5158,7 +5227,75 @@
                           <a:ea typeface="맑은 고딕" pitchFamily="34" charset="-122"/>
                           <a:cs typeface="맑은 고딕" pitchFamily="34" charset="-120"/>
                         </a:rPr>
-                        <a:t>파운데이션 1년</a:t>
+                        <a:t>파운데이션</a:t>
+                      </a:r>
+                      <a:endParaRPr lang="en-US" sz="1250" dirty="0">
+                        <a:latin typeface="맑은 고딕" charset="0"/>
+                        <a:ea typeface="맑은 고딕" charset="0"/>
+                        <a:cs typeface="맑은 고딕" charset="0"/>
+                      </a:endParaRPr>
+                    </a:p>
+                  </a:txBody>
+                  <a:tcPr marL="88900" marR="88900" marT="50800" marB="50800" anchor="ctr">
+                    <a:lnL w="6350" cap="flat" cmpd="sng" algn="ctr">
+                      <a:solidFill>
+                        <a:srgbClr val="DCD6C9"/>
+                      </a:solidFill>
+                      <a:prstDash val="solid"/>
+                      <a:round/>
+                      <a:headEnd type="none" w="med" len="med"/>
+                      <a:tailEnd type="none" w="med" len="med"/>
+                    </a:lnL>
+                    <a:lnR w="6350" cap="flat" cmpd="sng" algn="ctr">
+                      <a:solidFill>
+                        <a:srgbClr val="DCD6C9"/>
+                      </a:solidFill>
+                      <a:prstDash val="solid"/>
+                      <a:round/>
+                      <a:headEnd type="none" w="med" len="med"/>
+                      <a:tailEnd type="none" w="med" len="med"/>
+                    </a:lnR>
+                    <a:lnT w="6350" cap="flat" cmpd="sng" algn="ctr">
+                      <a:solidFill>
+                        <a:srgbClr val="DCD6C9"/>
+                      </a:solidFill>
+                      <a:prstDash val="solid"/>
+                      <a:round/>
+                      <a:headEnd type="none" w="med" len="med"/>
+                      <a:tailEnd type="none" w="med" len="med"/>
+                    </a:lnT>
+                    <a:lnB w="6350" cap="flat" cmpd="sng" algn="ctr">
+                      <a:solidFill>
+                        <a:srgbClr val="DCD6C9"/>
+                      </a:solidFill>
+                      <a:prstDash val="solid"/>
+                      <a:round/>
+                      <a:headEnd type="none" w="med" len="med"/>
+                      <a:tailEnd type="none" w="med" len="med"/>
+                    </a:lnB>
+                    <a:solidFill>
+                      <a:srgbClr val="FFFFFF"/>
+                    </a:solidFill>
+                  </a:tcPr>
+                </a:tc>
+                <a:tc>
+                  <a:txBody>
+                    <a:bodyPr/>
+                    <a:lstStyle/>
+                    <a:p>
+                      <a:pPr indent="0" marL="0">
+                        <a:buNone/>
+                      </a:pPr>
+                      <a:r>
+                        <a:rPr lang="en-US" sz="1250" dirty="0">
+                          <a:solidFill>
+                            <a:srgbClr val="1B2426"/>
+                          </a:solidFill>
+                          <a:latin typeface="맑은 고딕" pitchFamily="34" charset="0"/>
+                          <a:ea typeface="맑은 고딕" pitchFamily="34" charset="-122"/>
+                          <a:cs typeface="맑은 고딕" pitchFamily="34" charset="-120"/>
+                        </a:rPr>
+                        <a:t>1년</a:t>
                       </a:r>
                       <a:endParaRPr lang="en-US" sz="1250" dirty="0">
                         <a:latin typeface="맑은 고딕" charset="0"/>
@@ -5362,7 +5499,7 @@
                           <a:ea typeface="맑은 고딕" pitchFamily="34" charset="-122"/>
                           <a:cs typeface="맑은 고딕" pitchFamily="34" charset="-120"/>
                         </a:rPr>
-                        <a:t>—</a:t>
+                        <a:t>약 1,490만</a:t>
                       </a:r>
                       <a:endParaRPr lang="en-US" sz="1250" dirty="0">
                         <a:latin typeface="맑은 고딕" charset="0"/>
@@ -5414,7 +5551,7 @@
                   </a:tcPr>
                 </a:tc>
               </a:tr>
-              <a:tr h="457200">
+              <a:tr h="438912">
                 <a:tc>
                   <a:txBody>
                     <a:bodyPr/>
@@ -5432,7 +5569,75 @@
                           <a:ea typeface="맑은 고딕" pitchFamily="34" charset="-122"/>
                           <a:cs typeface="맑은 고딕" pitchFamily="34" charset="-120"/>
                         </a:rPr>
-                        <a:t>국제호텔경영 3년</a:t>
+                        <a:t>국제호텔경영</a:t>
+                      </a:r>
+                      <a:endParaRPr lang="en-US" sz="1250" dirty="0">
+                        <a:latin typeface="맑은 고딕" charset="0"/>
+                        <a:ea typeface="맑은 고딕" charset="0"/>
+                        <a:cs typeface="맑은 고딕" charset="0"/>
+                      </a:endParaRPr>
+                    </a:p>
+                  </a:txBody>
+                  <a:tcPr marL="88900" marR="88900" marT="50800" marB="50800" anchor="ctr">
+                    <a:lnL w="6350" cap="flat" cmpd="sng" algn="ctr">
+                      <a:solidFill>
+                        <a:srgbClr val="DCD6C9"/>
+                      </a:solidFill>
+                      <a:prstDash val="solid"/>
+                      <a:round/>
+                      <a:headEnd type="none" w="med" len="med"/>
+                      <a:tailEnd type="none" w="med" len="med"/>
+                    </a:lnL>
+                    <a:lnR w="6350" cap="flat" cmpd="sng" algn="ctr">
+                      <a:solidFill>
+                        <a:srgbClr val="DCD6C9"/>
+                      </a:solidFill>
+                      <a:prstDash val="solid"/>
+                      <a:round/>
+                      <a:headEnd type="none" w="med" len="med"/>
+                      <a:tailEnd type="none" w="med" len="med"/>
+                    </a:lnR>
+                    <a:lnT w="6350" cap="flat" cmpd="sng" algn="ctr">
+                      <a:solidFill>
+                        <a:srgbClr val="DCD6C9"/>
+                      </a:solidFill>
+                      <a:prstDash val="solid"/>
+                      <a:round/>
+                      <a:headEnd type="none" w="med" len="med"/>
+                      <a:tailEnd type="none" w="med" len="med"/>
+                    </a:lnT>
+                    <a:lnB w="6350" cap="flat" cmpd="sng" algn="ctr">
+                      <a:solidFill>
+                        <a:srgbClr val="DCD6C9"/>
+                      </a:solidFill>
+                      <a:prstDash val="solid"/>
+                      <a:round/>
+                      <a:headEnd type="none" w="med" len="med"/>
+                      <a:tailEnd type="none" w="med" len="med"/>
+                    </a:lnB>
+                    <a:solidFill>
+                      <a:srgbClr val="F1EDE4"/>
+                    </a:solidFill>
+                  </a:tcPr>
+                </a:tc>
+                <a:tc>
+                  <a:txBody>
+                    <a:bodyPr/>
+                    <a:lstStyle/>
+                    <a:p>
+                      <a:pPr indent="0" marL="0">
+                        <a:buNone/>
+                      </a:pPr>
+                      <a:r>
+                        <a:rPr lang="en-US" sz="1250" dirty="0">
+                          <a:solidFill>
+                            <a:srgbClr val="1B2426"/>
+                          </a:solidFill>
+                          <a:latin typeface="맑은 고딕" pitchFamily="34" charset="0"/>
+                          <a:ea typeface="맑은 고딕" pitchFamily="34" charset="-122"/>
+                          <a:cs typeface="맑은 고딕" pitchFamily="34" charset="-120"/>
+                        </a:rPr>
+                        <a:t>3년</a:t>
                       </a:r>
                       <a:endParaRPr lang="en-US" sz="1250" dirty="0">
                         <a:latin typeface="맑은 고딕" charset="0"/>
@@ -5688,7 +5893,7 @@
                   </a:tcPr>
                 </a:tc>
               </a:tr>
-              <a:tr h="457200">
+              <a:tr h="438912">
                 <a:tc>
                   <a:txBody>
                     <a:bodyPr/>
@@ -5706,7 +5911,7 @@
                           <a:ea typeface="맑은 고딕" pitchFamily="34" charset="-122"/>
                           <a:cs typeface="맑은 고딕" pitchFamily="34" charset="-120"/>
                         </a:rPr>
-                        <a:t>기계공학 4년</a:t>
+                        <a:t>기계공학</a:t>
                       </a:r>
                       <a:endParaRPr lang="en-US" sz="1250" dirty="0">
                         <a:latin typeface="맑은 고딕" charset="0"/>
@@ -5774,7 +5979,75 @@
                           <a:ea typeface="맑은 고딕" pitchFamily="34" charset="-122"/>
                           <a:cs typeface="맑은 고딕" pitchFamily="34" charset="-120"/>
                         </a:rPr>
-                        <a:t>연 50,184</a:t>
+                        <a:t>4년</a:t>
+                      </a:r>
+                      <a:endParaRPr lang="en-US" sz="1250" dirty="0">
+                        <a:latin typeface="맑은 고딕" charset="0"/>
+                        <a:ea typeface="맑은 고딕" charset="0"/>
+                        <a:cs typeface="맑은 고딕" charset="0"/>
+                      </a:endParaRPr>
+                    </a:p>
+                  </a:txBody>
+                  <a:tcPr marL="88900" marR="88900" marT="50800" marB="50800" anchor="ctr">
+                    <a:lnL w="6350" cap="flat" cmpd="sng" algn="ctr">
+                      <a:solidFill>
+                        <a:srgbClr val="DCD6C9"/>
+                      </a:solidFill>
+                      <a:prstDash val="solid"/>
+                      <a:round/>
+                      <a:headEnd type="none" w="med" len="med"/>
+                      <a:tailEnd type="none" w="med" len="med"/>
+                    </a:lnL>
+                    <a:lnR w="6350" cap="flat" cmpd="sng" algn="ctr">
+                      <a:solidFill>
+                        <a:srgbClr val="DCD6C9"/>
+                      </a:solidFill>
+                      <a:prstDash val="solid"/>
+                      <a:round/>
+                      <a:headEnd type="none" w="med" len="med"/>
+                      <a:tailEnd type="none" w="med" len="med"/>
+                    </a:lnR>
+                    <a:lnT w="6350" cap="flat" cmpd="sng" algn="ctr">
+                      <a:solidFill>
+                        <a:srgbClr val="DCD6C9"/>
+                      </a:solidFill>
+                      <a:prstDash val="solid"/>
+                      <a:round/>
+                      <a:headEnd type="none" w="med" len="med"/>
+                      <a:tailEnd type="none" w="med" len="med"/>
+                    </a:lnT>
+                    <a:lnB w="6350" cap="flat" cmpd="sng" algn="ctr">
+                      <a:solidFill>
+                        <a:srgbClr val="DCD6C9"/>
+                      </a:solidFill>
+                      <a:prstDash val="solid"/>
+                      <a:round/>
+                      <a:headEnd type="none" w="med" len="med"/>
+                      <a:tailEnd type="none" w="med" len="med"/>
+                    </a:lnB>
+                    <a:solidFill>
+                      <a:srgbClr val="FFFFFF"/>
+                    </a:solidFill>
+                  </a:tcPr>
+                </a:tc>
+                <a:tc>
+                  <a:txBody>
+                    <a:bodyPr/>
+                    <a:lstStyle/>
+                    <a:p>
+                      <a:pPr indent="0" marL="0">
+                        <a:buNone/>
+                      </a:pPr>
+                      <a:r>
+                        <a:rPr lang="en-US" sz="1250" dirty="0">
+                          <a:solidFill>
+                            <a:srgbClr val="1B2426"/>
+                          </a:solidFill>
+                          <a:latin typeface="맑은 고딕" pitchFamily="34" charset="0"/>
+                          <a:ea typeface="맑은 고딕" pitchFamily="34" charset="-122"/>
+                          <a:cs typeface="맑은 고딕" pitchFamily="34" charset="-120"/>
+                        </a:rPr>
+                        <a:t>200,736</a:t>
                       </a:r>
                       <a:endParaRPr lang="en-US" sz="1250" dirty="0">
                         <a:latin typeface="맑은 고딕" charset="0"/>
@@ -5962,7 +6235,7 @@
                   </a:tcPr>
                 </a:tc>
               </a:tr>
-              <a:tr h="457200">
+              <a:tr h="438912">
                 <a:tc>
                   <a:txBody>
                     <a:bodyPr/>
@@ -5980,7 +6253,7 @@
                           <a:ea typeface="맑은 고딕" pitchFamily="34" charset="-122"/>
                           <a:cs typeface="맑은 고딕" pitchFamily="34" charset="-120"/>
                         </a:rPr>
-                        <a:t>화학공학 4년</a:t>
+                        <a:t>약학</a:t>
                       </a:r>
                       <a:endParaRPr lang="en-US" sz="1250" dirty="0">
                         <a:latin typeface="맑은 고딕" charset="0"/>
@@ -6048,7 +6321,7 @@
                           <a:ea typeface="맑은 고딕" pitchFamily="34" charset="-122"/>
                           <a:cs typeface="맑은 고딕" pitchFamily="34" charset="-120"/>
                         </a:rPr>
-                        <a:t>연 42,240</a:t>
+                        <a:t>4년</a:t>
                       </a:r>
                       <a:endParaRPr lang="en-US" sz="1250" dirty="0">
                         <a:latin typeface="맑은 고딕" charset="0"/>
@@ -6116,7 +6389,7 @@
                           <a:ea typeface="맑은 고딕" pitchFamily="34" charset="-122"/>
                           <a:cs typeface="맑은 고딕" pitchFamily="34" charset="-120"/>
                         </a:rPr>
-                        <a:t>약 5,730만</a:t>
+                        <a:t>[학교 확인 후 기입]</a:t>
                       </a:r>
                       <a:endParaRPr lang="en-US" sz="1250" dirty="0">
                         <a:latin typeface="맑은 고딕" charset="0"/>
@@ -6184,7 +6457,7 @@
                           <a:ea typeface="맑은 고딕" pitchFamily="34" charset="-122"/>
                           <a:cs typeface="맑은 고딕" pitchFamily="34" charset="-120"/>
                         </a:rPr>
-                        <a:t>약 1,430만</a:t>
+                        <a:t>—</a:t>
                       </a:r>
                       <a:endParaRPr lang="en-US" sz="1250" dirty="0">
                         <a:latin typeface="맑은 고딕" charset="0"/>
@@ -6235,6 +6508,416 @@
                     </a:solidFill>
                   </a:tcPr>
                 </a:tc>
+                <a:tc>
+                  <a:txBody>
+                    <a:bodyPr/>
+                    <a:lstStyle/>
+                    <a:p>
+                      <a:pPr indent="0" marL="0">
+                        <a:buNone/>
+                      </a:pPr>
+                      <a:r>
+                        <a:rPr lang="en-US" sz="1250" dirty="0">
+                          <a:solidFill>
+                            <a:srgbClr val="1B2426"/>
+                          </a:solidFill>
+                          <a:latin typeface="맑은 고딕" pitchFamily="34" charset="0"/>
+                          <a:ea typeface="맑은 고딕" pitchFamily="34" charset="-122"/>
+                          <a:cs typeface="맑은 고딕" pitchFamily="34" charset="-120"/>
+                        </a:rPr>
+                        <a:t>—</a:t>
+                      </a:r>
+                      <a:endParaRPr lang="en-US" sz="1250" dirty="0">
+                        <a:latin typeface="맑은 고딕" charset="0"/>
+                        <a:ea typeface="맑은 고딕" charset="0"/>
+                        <a:cs typeface="맑은 고딕" charset="0"/>
+                      </a:endParaRPr>
+                    </a:p>
+                  </a:txBody>
+                  <a:tcPr marL="88900" marR="88900" marT="50800" marB="50800" anchor="ctr">
+                    <a:lnL w="6350" cap="flat" cmpd="sng" algn="ctr">
+                      <a:solidFill>
+                        <a:srgbClr val="DCD6C9"/>
+                      </a:solidFill>
+                      <a:prstDash val="solid"/>
+                      <a:round/>
+                      <a:headEnd type="none" w="med" len="med"/>
+                      <a:tailEnd type="none" w="med" len="med"/>
+                    </a:lnL>
+                    <a:lnR w="6350" cap="flat" cmpd="sng" algn="ctr">
+                      <a:solidFill>
+                        <a:srgbClr val="DCD6C9"/>
+                      </a:solidFill>
+                      <a:prstDash val="solid"/>
+                      <a:round/>
+                      <a:headEnd type="none" w="med" len="med"/>
+                      <a:tailEnd type="none" w="med" len="med"/>
+                    </a:lnR>
+                    <a:lnT w="6350" cap="flat" cmpd="sng" algn="ctr">
+                      <a:solidFill>
+                        <a:srgbClr val="DCD6C9"/>
+                      </a:solidFill>
+                      <a:prstDash val="solid"/>
+                      <a:round/>
+                      <a:headEnd type="none" w="med" len="med"/>
+                      <a:tailEnd type="none" w="med" len="med"/>
+                    </a:lnT>
+                    <a:lnB w="6350" cap="flat" cmpd="sng" algn="ctr">
+                      <a:solidFill>
+                        <a:srgbClr val="DCD6C9"/>
+                      </a:solidFill>
+                      <a:prstDash val="solid"/>
+                      <a:round/>
+                      <a:headEnd type="none" w="med" len="med"/>
+                      <a:tailEnd type="none" w="med" len="med"/>
+                    </a:lnB>
+                    <a:solidFill>
+                      <a:srgbClr val="F1EDE4"/>
+                    </a:solidFill>
+                  </a:tcPr>
+                </a:tc>
+              </a:tr>
+              <a:tr h="438912">
+                <a:tc>
+                  <a:txBody>
+                    <a:bodyPr/>
+                    <a:lstStyle/>
+                    <a:p>
+                      <a:pPr indent="0" marL="0">
+                        <a:buNone/>
+                      </a:pPr>
+                      <a:r>
+                        <a:rPr lang="en-US" sz="1250" dirty="0">
+                          <a:solidFill>
+                            <a:srgbClr val="1B2426"/>
+                          </a:solidFill>
+                          <a:latin typeface="맑은 고딕" pitchFamily="34" charset="0"/>
+                          <a:ea typeface="맑은 고딕" pitchFamily="34" charset="-122"/>
+                          <a:cs typeface="맑은 고딕" pitchFamily="34" charset="-120"/>
+                        </a:rPr>
+                        <a:t>파운데이션 + 기계공학</a:t>
+                      </a:r>
+                      <a:endParaRPr lang="en-US" sz="1250" dirty="0">
+                        <a:latin typeface="맑은 고딕" charset="0"/>
+                        <a:ea typeface="맑은 고딕" charset="0"/>
+                        <a:cs typeface="맑은 고딕" charset="0"/>
+                      </a:endParaRPr>
+                    </a:p>
+                  </a:txBody>
+                  <a:tcPr marL="88900" marR="88900" marT="50800" marB="50800" anchor="ctr">
+                    <a:lnL w="6350" cap="flat" cmpd="sng" algn="ctr">
+                      <a:solidFill>
+                        <a:srgbClr val="DCD6C9"/>
+                      </a:solidFill>
+                      <a:prstDash val="solid"/>
+                      <a:round/>
+                      <a:headEnd type="none" w="med" len="med"/>
+                      <a:tailEnd type="none" w="med" len="med"/>
+                    </a:lnL>
+                    <a:lnR w="6350" cap="flat" cmpd="sng" algn="ctr">
+                      <a:solidFill>
+                        <a:srgbClr val="DCD6C9"/>
+                      </a:solidFill>
+                      <a:prstDash val="solid"/>
+                      <a:round/>
+                      <a:headEnd type="none" w="med" len="med"/>
+                      <a:tailEnd type="none" w="med" len="med"/>
+                    </a:lnR>
+                    <a:lnT w="6350" cap="flat" cmpd="sng" algn="ctr">
+                      <a:solidFill>
+                        <a:srgbClr val="DCD6C9"/>
+                      </a:solidFill>
+                      <a:prstDash val="solid"/>
+                      <a:round/>
+                      <a:headEnd type="none" w="med" len="med"/>
+                      <a:tailEnd type="none" w="med" len="med"/>
+                    </a:lnT>
+                    <a:lnB w="6350" cap="flat" cmpd="sng" algn="ctr">
+                      <a:solidFill>
+                        <a:srgbClr val="DCD6C9"/>
+                      </a:solidFill>
+                      <a:prstDash val="solid"/>
+                      <a:round/>
+                      <a:headEnd type="none" w="med" len="med"/>
+                      <a:tailEnd type="none" w="med" len="med"/>
+                    </a:lnB>
+                    <a:solidFill>
+                      <a:srgbClr val="FFFFFF"/>
+                    </a:solidFill>
+                  </a:tcPr>
+                </a:tc>
+                <a:tc>
+                  <a:txBody>
+                    <a:bodyPr/>
+                    <a:lstStyle/>
+                    <a:p>
+                      <a:pPr indent="0" marL="0">
+                        <a:buNone/>
+                      </a:pPr>
+                      <a:r>
+                        <a:rPr lang="en-US" sz="1250" dirty="0">
+                          <a:solidFill>
+                            <a:srgbClr val="1B2426"/>
+                          </a:solidFill>
+                          <a:latin typeface="맑은 고딕" pitchFamily="34" charset="0"/>
+                          <a:ea typeface="맑은 고딕" pitchFamily="34" charset="-122"/>
+                          <a:cs typeface="맑은 고딕" pitchFamily="34" charset="-120"/>
+                        </a:rPr>
+                        <a:t>5년</a:t>
+                      </a:r>
+                      <a:endParaRPr lang="en-US" sz="1250" dirty="0">
+                        <a:latin typeface="맑은 고딕" charset="0"/>
+                        <a:ea typeface="맑은 고딕" charset="0"/>
+                        <a:cs typeface="맑은 고딕" charset="0"/>
+                      </a:endParaRPr>
+                    </a:p>
+                  </a:txBody>
+                  <a:tcPr marL="88900" marR="88900" marT="50800" marB="50800" anchor="ctr">
+                    <a:lnL w="6350" cap="flat" cmpd="sng" algn="ctr">
+                      <a:solidFill>
+                        <a:srgbClr val="DCD6C9"/>
+                      </a:solidFill>
+                      <a:prstDash val="solid"/>
+                      <a:round/>
+                      <a:headEnd type="none" w="med" len="med"/>
+                      <a:tailEnd type="none" w="med" len="med"/>
+                    </a:lnL>
+                    <a:lnR w="6350" cap="flat" cmpd="sng" algn="ctr">
+                      <a:solidFill>
+                        <a:srgbClr val="DCD6C9"/>
+                      </a:solidFill>
+                      <a:prstDash val="solid"/>
+                      <a:round/>
+                      <a:headEnd type="none" w="med" len="med"/>
+                      <a:tailEnd type="none" w="med" len="med"/>
+                    </a:lnR>
+                    <a:lnT w="6350" cap="flat" cmpd="sng" algn="ctr">
+                      <a:solidFill>
+                        <a:srgbClr val="DCD6C9"/>
+                      </a:solidFill>
+                      <a:prstDash val="solid"/>
+                      <a:round/>
+                      <a:headEnd type="none" w="med" len="med"/>
+                      <a:tailEnd type="none" w="med" len="med"/>
+                    </a:lnT>
+                    <a:lnB w="6350" cap="flat" cmpd="sng" algn="ctr">
+                      <a:solidFill>
+                        <a:srgbClr val="DCD6C9"/>
+                      </a:solidFill>
+                      <a:prstDash val="solid"/>
+                      <a:round/>
+                      <a:headEnd type="none" w="med" len="med"/>
+                      <a:tailEnd type="none" w="med" len="med"/>
+                    </a:lnB>
+                    <a:solidFill>
+                      <a:srgbClr val="FFFFFF"/>
+                    </a:solidFill>
+                  </a:tcPr>
+                </a:tc>
+                <a:tc>
+                  <a:txBody>
+                    <a:bodyPr/>
+                    <a:lstStyle/>
+                    <a:p>
+                      <a:pPr indent="0" marL="0">
+                        <a:buNone/>
+                      </a:pPr>
+                      <a:r>
+                        <a:rPr lang="en-US" sz="1250" dirty="0">
+                          <a:solidFill>
+                            <a:srgbClr val="1B2426"/>
+                          </a:solidFill>
+                          <a:latin typeface="맑은 고딕" pitchFamily="34" charset="0"/>
+                          <a:ea typeface="맑은 고딕" pitchFamily="34" charset="-122"/>
+                          <a:cs typeface="맑은 고딕" pitchFamily="34" charset="-120"/>
+                        </a:rPr>
+                        <a:t>244,780</a:t>
+                      </a:r>
+                      <a:endParaRPr lang="en-US" sz="1250" dirty="0">
+                        <a:latin typeface="맑은 고딕" charset="0"/>
+                        <a:ea typeface="맑은 고딕" charset="0"/>
+                        <a:cs typeface="맑은 고딕" charset="0"/>
+                      </a:endParaRPr>
+                    </a:p>
+                  </a:txBody>
+                  <a:tcPr marL="88900" marR="88900" marT="50800" marB="50800" anchor="ctr">
+                    <a:lnL w="6350" cap="flat" cmpd="sng" algn="ctr">
+                      <a:solidFill>
+                        <a:srgbClr val="DCD6C9"/>
+                      </a:solidFill>
+                      <a:prstDash val="solid"/>
+                      <a:round/>
+                      <a:headEnd type="none" w="med" len="med"/>
+                      <a:tailEnd type="none" w="med" len="med"/>
+                    </a:lnL>
+                    <a:lnR w="6350" cap="flat" cmpd="sng" algn="ctr">
+                      <a:solidFill>
+                        <a:srgbClr val="DCD6C9"/>
+                      </a:solidFill>
+                      <a:prstDash val="solid"/>
+                      <a:round/>
+                      <a:headEnd type="none" w="med" len="med"/>
+                      <a:tailEnd type="none" w="med" len="med"/>
+                    </a:lnR>
+                    <a:lnT w="6350" cap="flat" cmpd="sng" algn="ctr">
+                      <a:solidFill>
+                        <a:srgbClr val="DCD6C9"/>
+                      </a:solidFill>
+                      <a:prstDash val="solid"/>
+                      <a:round/>
+                      <a:headEnd type="none" w="med" len="med"/>
+                      <a:tailEnd type="none" w="med" len="med"/>
+                    </a:lnT>
+                    <a:lnB w="6350" cap="flat" cmpd="sng" algn="ctr">
+                      <a:solidFill>
+                        <a:srgbClr val="DCD6C9"/>
+                      </a:solidFill>
+                      <a:prstDash val="solid"/>
+                      <a:round/>
+                      <a:headEnd type="none" w="med" len="med"/>
+                      <a:tailEnd type="none" w="med" len="med"/>
+                    </a:lnB>
+                    <a:solidFill>
+                      <a:srgbClr val="FFFFFF"/>
+                    </a:solidFill>
+                  </a:tcPr>
+                </a:tc>
+                <a:tc>
+                  <a:txBody>
+                    <a:bodyPr/>
+                    <a:lstStyle/>
+                    <a:p>
+                      <a:pPr indent="0" marL="0">
+                        <a:buNone/>
+                      </a:pPr>
+                      <a:r>
+                        <a:rPr lang="en-US" sz="1250" dirty="0">
+                          <a:solidFill>
+                            <a:srgbClr val="1B2426"/>
+                          </a:solidFill>
+                          <a:latin typeface="맑은 고딕" pitchFamily="34" charset="0"/>
+                          <a:ea typeface="맑은 고딕" pitchFamily="34" charset="-122"/>
+                          <a:cs typeface="맑은 고딕" pitchFamily="34" charset="-120"/>
+                        </a:rPr>
+                        <a:t>약 8,300만</a:t>
+                      </a:r>
+                      <a:endParaRPr lang="en-US" sz="1250" dirty="0">
+                        <a:latin typeface="맑은 고딕" charset="0"/>
+                        <a:ea typeface="맑은 고딕" charset="0"/>
+                        <a:cs typeface="맑은 고딕" charset="0"/>
+                      </a:endParaRPr>
+                    </a:p>
+                  </a:txBody>
+                  <a:tcPr marL="88900" marR="88900" marT="50800" marB="50800" anchor="ctr">
+                    <a:lnL w="6350" cap="flat" cmpd="sng" algn="ctr">
+                      <a:solidFill>
+                        <a:srgbClr val="DCD6C9"/>
+                      </a:solidFill>
+                      <a:prstDash val="solid"/>
+                      <a:round/>
+                      <a:headEnd type="none" w="med" len="med"/>
+                      <a:tailEnd type="none" w="med" len="med"/>
+                    </a:lnL>
+                    <a:lnR w="6350" cap="flat" cmpd="sng" algn="ctr">
+                      <a:solidFill>
+                        <a:srgbClr val="DCD6C9"/>
+                      </a:solidFill>
+                      <a:prstDash val="solid"/>
+                      <a:round/>
+                      <a:headEnd type="none" w="med" len="med"/>
+                      <a:tailEnd type="none" w="med" len="med"/>
+                    </a:lnR>
+                    <a:lnT w="6350" cap="flat" cmpd="sng" algn="ctr">
+                      <a:solidFill>
+                        <a:srgbClr val="DCD6C9"/>
+                      </a:solidFill>
+                      <a:prstDash val="solid"/>
+                      <a:round/>
+                      <a:headEnd type="none" w="med" len="med"/>
+                      <a:tailEnd type="none" w="med" len="med"/>
+                    </a:lnT>
+                    <a:lnB w="6350" cap="flat" cmpd="sng" algn="ctr">
+                      <a:solidFill>
+                        <a:srgbClr val="DCD6C9"/>
+                      </a:solidFill>
+                      <a:prstDash val="solid"/>
+                      <a:round/>
+                      <a:headEnd type="none" w="med" len="med"/>
+                      <a:tailEnd type="none" w="med" len="med"/>
+                    </a:lnB>
+                    <a:solidFill>
+                      <a:srgbClr val="FFFFFF"/>
+                    </a:solidFill>
+                  </a:tcPr>
+                </a:tc>
+                <a:tc>
+                  <a:txBody>
+                    <a:bodyPr/>
+                    <a:lstStyle/>
+                    <a:p>
+                      <a:pPr indent="0" marL="0">
+                        <a:buNone/>
+                      </a:pPr>
+                      <a:r>
+                        <a:rPr lang="en-US" sz="1250" dirty="0">
+                          <a:solidFill>
+                            <a:srgbClr val="1B2426"/>
+                          </a:solidFill>
+                          <a:latin typeface="맑은 고딕" pitchFamily="34" charset="0"/>
+                          <a:ea typeface="맑은 고딕" pitchFamily="34" charset="-122"/>
+                          <a:cs typeface="맑은 고딕" pitchFamily="34" charset="-120"/>
+                        </a:rPr>
+                        <a:t>약 1,660만</a:t>
+                      </a:r>
+                      <a:endParaRPr lang="en-US" sz="1250" dirty="0">
+                        <a:latin typeface="맑은 고딕" charset="0"/>
+                        <a:ea typeface="맑은 고딕" charset="0"/>
+                        <a:cs typeface="맑은 고딕" charset="0"/>
+                      </a:endParaRPr>
+                    </a:p>
+                  </a:txBody>
+                  <a:tcPr marL="88900" marR="88900" marT="50800" marB="50800" anchor="ctr">
+                    <a:lnL w="6350" cap="flat" cmpd="sng" algn="ctr">
+                      <a:solidFill>
+                        <a:srgbClr val="DCD6C9"/>
+                      </a:solidFill>
+                      <a:prstDash val="solid"/>
+                      <a:round/>
+                      <a:headEnd type="none" w="med" len="med"/>
+                      <a:tailEnd type="none" w="med" len="med"/>
+                    </a:lnL>
+                    <a:lnR w="6350" cap="flat" cmpd="sng" algn="ctr">
+                      <a:solidFill>
+                        <a:srgbClr val="DCD6C9"/>
+                      </a:solidFill>
+                      <a:prstDash val="solid"/>
+                      <a:round/>
+                      <a:headEnd type="none" w="med" len="med"/>
+                      <a:tailEnd type="none" w="med" len="med"/>
+                    </a:lnR>
+                    <a:lnT w="6350" cap="flat" cmpd="sng" algn="ctr">
+                      <a:solidFill>
+                        <a:srgbClr val="DCD6C9"/>
+                      </a:solidFill>
+                      <a:prstDash val="solid"/>
+                      <a:round/>
+                      <a:headEnd type="none" w="med" len="med"/>
+                      <a:tailEnd type="none" w="med" len="med"/>
+                    </a:lnT>
+                    <a:lnB w="6350" cap="flat" cmpd="sng" algn="ctr">
+                      <a:solidFill>
+                        <a:srgbClr val="DCD6C9"/>
+                      </a:solidFill>
+                      <a:prstDash val="solid"/>
+                      <a:round/>
+                      <a:headEnd type="none" w="med" len="med"/>
+                      <a:tailEnd type="none" w="med" len="med"/>
+                    </a:lnB>
+                    <a:solidFill>
+                      <a:srgbClr val="FFFFFF"/>
+                    </a:solidFill>
+                  </a:tcPr>
+                </a:tc>
               </a:tr>
             </a:tbl>
           </a:graphicData>
@@ -6242,14 +6925,36 @@
       </p:graphicFrame>
       <p:sp>
         <p:nvSpPr>
-          <p:cNvPr id="8" name="Text 5"/>
+          <p:cNvPr id="8" name="Shape 5"/>
+          <p:cNvSpPr/>
+          <p:nvPr/>
+        </p:nvSpPr>
+        <p:spPr>
+          <a:xfrm>
+            <a:off x="640080" y="4572000"/>
+            <a:ext cx="3529584" cy="1133856"/>
+          </a:xfrm>
+          <a:prstGeom prst="roundRect">
+            <a:avLst>
+              <a:gd name="adj" fmla="val 5645"/>
+            </a:avLst>
+          </a:prstGeom>
+          <a:solidFill>
+            <a:srgbClr val="F1EDE4"/>
+          </a:solidFill>
+          <a:ln/>
+        </p:spPr>
+      </p:sp>
+      <p:sp>
+        <p:nvSpPr>
+          <p:cNvPr id="9" name="Text 6"/>
           <p:cNvSpPr txBox="1"/>
           <p:nvPr/>
         </p:nvSpPr>
         <p:spPr>
           <a:xfrm>
-            <a:off x="7223760" y="1828800"/>
-            <a:ext cx="4325112" cy="274320"/>
+            <a:off x="877824" y="4700016"/>
+            <a:ext cx="3054096" cy="274320"/>
           </a:xfrm>
           <a:prstGeom prst="rect">
             <a:avLst/>
@@ -6268,71 +6973,7 @@
               <a:buNone/>
             </a:pPr>
             <a:r>
-              <a:rPr lang="en-US" sz="1400" b="1" dirty="0">
-                <a:solidFill>
-                  <a:srgbClr val="0C2E2C"/>
-                </a:solidFill>
-                <a:latin typeface="맑은 고딕" pitchFamily="34" charset="0"/>
-                <a:ea typeface="맑은 고딕" pitchFamily="34" charset="-122"/>
-                <a:cs typeface="맑은 고딕" pitchFamily="34" charset="-120"/>
-              </a:rPr>
-              <a:t>글로벌 학위 · 편입 경로</a:t>
-            </a:r>
-            <a:endParaRPr lang="en-US" sz="1400" dirty="0"/>
-          </a:p>
-        </p:txBody>
-      </p:sp>
-      <p:sp>
-        <p:nvSpPr>
-          <p:cNvPr id="9" name="Shape 6"/>
-          <p:cNvSpPr/>
-          <p:nvPr/>
-        </p:nvSpPr>
-        <p:spPr>
-          <a:xfrm>
-            <a:off x="7223760" y="2194560"/>
-            <a:ext cx="4325112" cy="859536"/>
-          </a:xfrm>
-          <a:prstGeom prst="roundRect">
-            <a:avLst>
-              <a:gd name="adj" fmla="val 6383"/>
-            </a:avLst>
-          </a:prstGeom>
-          <a:solidFill>
-            <a:srgbClr val="F1EDE4"/>
-          </a:solidFill>
-          <a:ln/>
-        </p:spPr>
-      </p:sp>
-      <p:sp>
-        <p:nvSpPr>
-          <p:cNvPr id="10" name="Text 7"/>
-          <p:cNvSpPr txBox="1"/>
-          <p:nvPr/>
-        </p:nvSpPr>
-        <p:spPr>
-          <a:xfrm>
-            <a:off x="7443216" y="2304288"/>
-            <a:ext cx="3886200" cy="256032"/>
-          </a:xfrm>
-          <a:prstGeom prst="rect">
-            <a:avLst/>
-          </a:prstGeom>
-          <a:noFill/>
-          <a:ln/>
-        </p:spPr>
-        <p:txBody>
-          <a:bodyPr wrap="square" lIns="0" tIns="0" rIns="0" bIns="0" rtlCol="0" anchor="t"/>
-          <a:lstStyle/>
-          <a:p>
-            <a:pPr algn="l" indent="0" marL="0">
-              <a:lnSpc>
-                <a:spcPct val="122000"/>
-              </a:lnSpc>
-              <a:buNone/>
-            </a:pPr>
-            <a:r>
-              <a:rPr lang="en-US" sz="1250" b="1" dirty="0">
+              <a:rPr lang="en-US" sz="1300" b="1" dirty="0">
                 <a:solidFill>
                   <a:srgbClr val="134744"/>
                 </a:solidFill>
@@ -6342,20 +6983,20 @@
               </a:rPr>
               <a:t>복수 학위 (Dual Award)</a:t>
             </a:r>
-            <a:endParaRPr lang="en-US" sz="1250" dirty="0"/>
+            <a:endParaRPr lang="en-US" sz="1300" dirty="0"/>
           </a:p>
         </p:txBody>
       </p:sp>
       <p:sp>
         <p:nvSpPr>
-          <p:cNvPr id="11" name="Text 8"/>
+          <p:cNvPr id="10" name="Text 7"/>
           <p:cNvSpPr txBox="1"/>
           <p:nvPr/>
         </p:nvSpPr>
         <p:spPr>
           <a:xfrm>
-            <a:off x="7443216" y="2578608"/>
-            <a:ext cx="3886200" cy="402336"/>
+            <a:off x="877824" y="4992624"/>
+            <a:ext cx="3054096" cy="603504"/>
           </a:xfrm>
           <a:prstGeom prst="rect">
             <a:avLst/>
@@ -6369,12 +7010,12 @@
           <a:p>
             <a:pPr algn="l" indent="0" marL="0">
               <a:lnSpc>
-                <a:spcPct val="135000"/>
+                <a:spcPct val="140000"/>
               </a:lnSpc>
               <a:buNone/>
             </a:pPr>
             <a:r>
-              <a:rPr lang="en-US" sz="1100" dirty="0">
+              <a:rPr lang="en-US" sz="1150" dirty="0">
                 <a:solidFill>
                   <a:srgbClr val="1B2426"/>
                 </a:solidFill>
@@ -6382,26 +7023,46 @@
                 <a:ea typeface="맑은 고딕" pitchFamily="34" charset="-122"/>
                 <a:cs typeface="맑은 고딕" pitchFamily="34" charset="-120"/>
               </a:rPr>
-              <a:t>UWE 브리스톨(영국) · QUT(호주) — 경영·컴퓨팅 계열</a:t>
+              <a:t>UWE 브리스톨(영국) · QUT(호주)</a:t>
             </a:r>
-            <a:endParaRPr lang="en-US" sz="1100" dirty="0"/>
+            <a:endParaRPr lang="en-US" sz="1150" dirty="0"/>
+          </a:p>
+          <a:p>
+            <a:pPr algn="l" indent="0" marL="0">
+              <a:lnSpc>
+                <a:spcPct val="140000"/>
+              </a:lnSpc>
+              <a:buNone/>
+            </a:pPr>
+            <a:r>
+              <a:rPr lang="en-US" sz="1150" dirty="0">
+                <a:solidFill>
+                  <a:srgbClr val="1B2426"/>
+                </a:solidFill>
+                <a:latin typeface="맑은 고딕" pitchFamily="34" charset="0"/>
+                <a:ea typeface="맑은 고딕" pitchFamily="34" charset="-122"/>
+                <a:cs typeface="맑은 고딕" pitchFamily="34" charset="-120"/>
+              </a:rPr>
+              <a:t>경영 · 컴퓨팅 계열</a:t>
+            </a:r>
+            <a:endParaRPr lang="en-US" sz="1150" dirty="0"/>
           </a:p>
         </p:txBody>
       </p:sp>
       <p:sp>
         <p:nvSpPr>
-          <p:cNvPr id="12" name="Shape 9"/>
+          <p:cNvPr id="11" name="Shape 8"/>
           <p:cNvSpPr/>
           <p:nvPr/>
         </p:nvSpPr>
         <p:spPr>
           <a:xfrm>
-            <a:off x="7223760" y="3163824"/>
-            <a:ext cx="4325112" cy="859536"/>
+            <a:off x="4334256" y="4572000"/>
+            <a:ext cx="3529584" cy="1133856"/>
           </a:xfrm>
           <a:prstGeom prst="roundRect">
             <a:avLst>
-              <a:gd name="adj" fmla="val 6383"/>
+              <a:gd name="adj" fmla="val 5645"/>
             </a:avLst>
           </a:prstGeom>
           <a:solidFill>
@@ -6412,14 +7073,14 @@
       </p:sp>
       <p:sp>
         <p:nvSpPr>
-          <p:cNvPr id="13" name="Text 10"/>
+          <p:cNvPr id="12" name="Text 9"/>
           <p:cNvSpPr txBox="1"/>
           <p:nvPr/>
         </p:nvSpPr>
         <p:spPr>
           <a:xfrm>
-            <a:off x="7443216" y="3273552"/>
-            <a:ext cx="3886200" cy="256032"/>
+            <a:off x="4572000" y="4700016"/>
+            <a:ext cx="3054096" cy="274320"/>
           </a:xfrm>
           <a:prstGeom prst="rect">
             <a:avLst/>
@@ -6438,7 +7099,7 @@
               <a:buNone/>
             </a:pPr>
             <a:r>
-              <a:rPr lang="en-US" sz="1250" b="1" dirty="0">
+              <a:rPr lang="en-US" sz="1300" b="1" dirty="0">
                 <a:solidFill>
                   <a:srgbClr val="134744"/>
                 </a:solidFill>
@@ -6448,20 +7109,20 @@
               </a:rPr>
               <a:t>트위닝 · 편입</a:t>
             </a:r>
-            <a:endParaRPr lang="en-US" sz="1250" dirty="0"/>
+            <a:endParaRPr lang="en-US" sz="1300" dirty="0"/>
           </a:p>
         </p:txBody>
       </p:sp>
       <p:sp>
         <p:nvSpPr>
-          <p:cNvPr id="14" name="Text 11"/>
+          <p:cNvPr id="13" name="Text 10"/>
           <p:cNvSpPr txBox="1"/>
           <p:nvPr/>
         </p:nvSpPr>
         <p:spPr>
           <a:xfrm>
-            <a:off x="7443216" y="3547872"/>
-            <a:ext cx="3886200" cy="402336"/>
+            <a:off x="4572000" y="4992624"/>
+            <a:ext cx="3054096" cy="603504"/>
           </a:xfrm>
           <a:prstGeom prst="rect">
             <a:avLst/>
@@ -6475,12 +7136,12 @@
           <a:p>
             <a:pPr algn="l" indent="0" marL="0">
               <a:lnSpc>
-                <a:spcPct val="135000"/>
+                <a:spcPct val="140000"/>
               </a:lnSpc>
               <a:buNone/>
             </a:pPr>
             <a:r>
-              <a:rPr lang="en-US" sz="1100" dirty="0">
+              <a:rPr lang="en-US" sz="1150" dirty="0">
                 <a:solidFill>
                   <a:srgbClr val="1B2426"/>
                 </a:solidFill>
@@ -6488,26 +7149,46 @@
                 <a:ea typeface="맑은 고딕" pitchFamily="34" charset="-122"/>
                 <a:cs typeface="맑은 고딕" pitchFamily="34" charset="-120"/>
               </a:rPr>
-              <a:t>호주 디킨·모나쉬·QUT·멜버른·남호주대, 영국 샐퍼드·UWE, 뉴질랜드</a:t>
+              <a:t>호주 디킨·모나쉬·QUT·멜버른·남호주대</a:t>
             </a:r>
-            <a:endParaRPr lang="en-US" sz="1100" dirty="0"/>
+            <a:endParaRPr lang="en-US" sz="1150" dirty="0"/>
+          </a:p>
+          <a:p>
+            <a:pPr algn="l" indent="0" marL="0">
+              <a:lnSpc>
+                <a:spcPct val="140000"/>
+              </a:lnSpc>
+              <a:buNone/>
+            </a:pPr>
+            <a:r>
+              <a:rPr lang="en-US" sz="1150" dirty="0">
+                <a:solidFill>
+                  <a:srgbClr val="1B2426"/>
+                </a:solidFill>
+                <a:latin typeface="맑은 고딕" pitchFamily="34" charset="0"/>
+                <a:ea typeface="맑은 고딕" pitchFamily="34" charset="-122"/>
+                <a:cs typeface="맑은 고딕" pitchFamily="34" charset="-120"/>
+              </a:rPr>
+              <a:t>영국 샐퍼드·UWE, 뉴질랜드</a:t>
+            </a:r>
+            <a:endParaRPr lang="en-US" sz="1150" dirty="0"/>
           </a:p>
         </p:txBody>
       </p:sp>
       <p:sp>
         <p:nvSpPr>
-          <p:cNvPr id="15" name="Shape 12"/>
+          <p:cNvPr id="14" name="Shape 11"/>
           <p:cNvSpPr/>
           <p:nvPr/>
         </p:nvSpPr>
         <p:spPr>
           <a:xfrm>
-            <a:off x="7223760" y="4133088"/>
-            <a:ext cx="4325112" cy="859536"/>
+            <a:off x="8028432" y="4572000"/>
+            <a:ext cx="3529584" cy="1133856"/>
           </a:xfrm>
           <a:prstGeom prst="roundRect">
             <a:avLst>
-              <a:gd name="adj" fmla="val 6383"/>
+              <a:gd name="adj" fmla="val 5645"/>
             </a:avLst>
           </a:prstGeom>
           <a:solidFill>
@@ -6518,14 +7199,14 @@
       </p:sp>
       <p:sp>
         <p:nvSpPr>
-          <p:cNvPr id="16" name="Text 13"/>
+          <p:cNvPr id="15" name="Text 12"/>
           <p:cNvSpPr txBox="1"/>
           <p:nvPr/>
         </p:nvSpPr>
         <p:spPr>
           <a:xfrm>
-            <a:off x="7443216" y="4242816"/>
-            <a:ext cx="3886200" cy="256032"/>
+            <a:off x="8266176" y="4700016"/>
+            <a:ext cx="3054096" cy="274320"/>
           </a:xfrm>
           <a:prstGeom prst="rect">
             <a:avLst/>
@@ -6544,7 +7225,7 @@
               <a:buNone/>
             </a:pPr>
             <a:r>
-              <a:rPr lang="en-US" sz="1250" b="1" dirty="0">
+              <a:rPr lang="en-US" sz="1300" b="1" dirty="0">
                 <a:solidFill>
                   <a:srgbClr val="134744"/>
                 </a:solidFill>
@@ -6554,20 +7235,20 @@
               </a:rPr>
               <a:t>ADTP (학점 이전)</a:t>
             </a:r>
-            <a:endParaRPr lang="en-US" sz="1250" dirty="0"/>
+            <a:endParaRPr lang="en-US" sz="1300" dirty="0"/>
           </a:p>
         </p:txBody>
       </p:sp>
       <p:sp>
         <p:nvSpPr>
-          <p:cNvPr id="17" name="Text 14"/>
+          <p:cNvPr id="16" name="Text 13"/>
           <p:cNvSpPr txBox="1"/>
           <p:nvPr/>
         </p:nvSpPr>
         <p:spPr>
           <a:xfrm>
-            <a:off x="7443216" y="4517136"/>
-            <a:ext cx="3886200" cy="402336"/>
+            <a:off x="8266176" y="4992624"/>
+            <a:ext cx="3054096" cy="603504"/>
           </a:xfrm>
           <a:prstGeom prst="rect">
             <a:avLst/>
@@ -6581,12 +7262,12 @@
           <a:p>
             <a:pPr algn="l" indent="0" marL="0">
               <a:lnSpc>
-                <a:spcPct val="135000"/>
+                <a:spcPct val="140000"/>
               </a:lnSpc>
               <a:buNone/>
             </a:pPr>
             <a:r>
-              <a:rPr lang="en-US" sz="1100" dirty="0">
+              <a:rPr lang="en-US" sz="1150" dirty="0">
                 <a:solidFill>
                   <a:srgbClr val="1B2426"/>
                 </a:solidFill>
@@ -6594,96 +7275,10 @@
                 <a:ea typeface="맑은 고딕" pitchFamily="34" charset="-122"/>
                 <a:cs typeface="맑은 고딕" pitchFamily="34" charset="-120"/>
               </a:rPr>
-              <a:t>1996년 개설 · 미국 상위권 편입. 합격 보장 아님</a:t>
+              <a:t>1996년 개설 · 미국 상위권 편입</a:t>
             </a:r>
-            <a:endParaRPr lang="en-US" sz="1100" dirty="0"/>
-          </a:p>
-        </p:txBody>
-      </p:sp>
-      <p:sp>
-        <p:nvSpPr>
-          <p:cNvPr id="18" name="Shape 15"/>
-          <p:cNvSpPr/>
-          <p:nvPr/>
-        </p:nvSpPr>
-        <p:spPr>
-          <a:xfrm>
-            <a:off x="640080" y="4297680"/>
-            <a:ext cx="6309360" cy="1005840"/>
-          </a:xfrm>
-          <a:prstGeom prst="roundRect">
-            <a:avLst>
-              <a:gd name="adj" fmla="val 6364"/>
-            </a:avLst>
-          </a:prstGeom>
-          <a:solidFill>
-            <a:srgbClr val="F7EBE6"/>
-          </a:solidFill>
-          <a:ln/>
-        </p:spPr>
-      </p:sp>
-      <p:sp>
-        <p:nvSpPr>
-          <p:cNvPr id="19" name="Text 16"/>
-          <p:cNvSpPr txBox="1"/>
-          <p:nvPr/>
-        </p:nvSpPr>
-        <p:spPr>
-          <a:xfrm>
-            <a:off x="896112" y="4407408"/>
-            <a:ext cx="5797296" cy="256032"/>
-          </a:xfrm>
-          <a:prstGeom prst="rect">
-            <a:avLst/>
-          </a:prstGeom>
-          <a:noFill/>
-          <a:ln/>
-        </p:spPr>
-        <p:txBody>
-          <a:bodyPr wrap="square" lIns="0" tIns="0" rIns="0" bIns="0" rtlCol="0" anchor="t"/>
-          <a:lstStyle/>
-          <a:p>
-            <a:pPr algn="l" indent="0" marL="0">
-              <a:lnSpc>
-                <a:spcPct val="122000"/>
-              </a:lnSpc>
-              <a:buNone/>
-            </a:pPr>
-            <a:r>
-              <a:rPr lang="en-US" sz="1250" b="1" dirty="0">
-                <a:solidFill>
-                  <a:srgbClr val="A8412C"/>
-                </a:solidFill>
-                <a:latin typeface="맑은 고딕" pitchFamily="34" charset="0"/>
-                <a:ea typeface="맑은 고딕" pitchFamily="34" charset="-122"/>
-                <a:cs typeface="맑은 고딕" pitchFamily="34" charset="-120"/>
-              </a:rPr>
-              <a:t>학비 읽는 법</a:t>
-            </a:r>
-            <a:endParaRPr lang="en-US" sz="1250" dirty="0"/>
-          </a:p>
-        </p:txBody>
-      </p:sp>
-      <p:sp>
-        <p:nvSpPr>
-          <p:cNvPr id="20" name="Text 17"/>
-          <p:cNvSpPr txBox="1"/>
-          <p:nvPr/>
-        </p:nvSpPr>
-        <p:spPr>
-          <a:xfrm>
-            <a:off x="896112" y="4681728"/>
-            <a:ext cx="5797296" cy="512064"/>
-          </a:xfrm>
-          <a:prstGeom prst="rect">
-            <a:avLst/>
-          </a:prstGeom>
-          <a:noFill/>
-          <a:ln/>
-        </p:spPr>
-        <p:txBody>
-          <a:bodyPr wrap="square" lIns="0" tIns="0" rIns="0" bIns="0" rtlCol="0" anchor="t"/>
-          <a:lstStyle/>
+            <a:endParaRPr lang="en-US" sz="1150" dirty="0"/>
+          </a:p>
           <a:p>
             <a:pPr algn="l" indent="0" marL="0">
               <a:lnSpc>
@@ -6692,7 +7287,7 @@
               <a:buNone/>
             </a:pPr>
             <a:r>
-              <a:rPr lang="en-US" sz="1200" dirty="0">
+              <a:rPr lang="en-US" sz="1150" dirty="0">
                 <a:solidFill>
                   <a:srgbClr val="1B2426"/>
                 </a:solidFill>
@@ -6700,15 +7295,15 @@
                 <a:ea typeface="맑은 고딕" pitchFamily="34" charset="-122"/>
                 <a:cs typeface="맑은 고딕" pitchFamily="34" charset="-120"/>
               </a:rPr>
-              <a:t>호텔경영 3년은 총액 4,510만 원, 공학 4년은 연간 표기입니다. 총액인지 연간인지 반드시 구분해 안내하십시오.</a:t>
+              <a:t>합격 보장 아님</a:t>
             </a:r>
-            <a:endParaRPr lang="en-US" sz="1200" dirty="0"/>
+            <a:endParaRPr lang="en-US" sz="1150" dirty="0"/>
           </a:p>
         </p:txBody>
       </p:sp>
       <p:sp>
         <p:nvSpPr>
-          <p:cNvPr id="21" name="Text 18"/>
+          <p:cNvPr id="17" name="Text 14"/>
           <p:cNvSpPr txBox="1"/>
           <p:nvPr/>
         </p:nvSpPr>
@@ -6733,6 +7328,17 @@
               </a:lnSpc>
               <a:buNone/>
             </a:pPr>
+            <a:r>
+              <a:rPr lang="en-US" sz="900" dirty="0">
+                <a:solidFill>
+                  <a:srgbClr val="6E7C7A"/>
+                </a:solidFill>
+                <a:latin typeface="맑은 고딕" pitchFamily="34" charset="0"/>
+                <a:ea typeface="맑은 고딕" pitchFamily="34" charset="-122"/>
+                <a:cs typeface="맑은 고딕" pitchFamily="34" charset="-120"/>
+              </a:rPr>
+              <a:t>환율 RM 1 ≈ 339원 기준 · 5년은 파운데이션 1년 + 본과 4년 ·  2025년 7월부터 외국인 학비에 6% 서비스세(SST)가 별도 부과됩니다</a:t>
+            </a:r>
             <a:endParaRPr lang="en-US" sz="900" dirty="0"/>
           </a:p>
         </p:txBody>
@@ -8669,7 +9275,7 @@
                 <a:ea typeface="맑은 고딕" pitchFamily="34" charset="-122"/>
                 <a:cs typeface="맑은 고딕" pitchFamily="34" charset="-120"/>
               </a:rPr>
-              <a:t>국제학생 기준 (2026)</a:t>
+              <a:t>국제학생 기준 · 달러 표기를 링깃으로 환산해 통일했습니다</a:t>
             </a:r>
             <a:endParaRPr lang="en-US" sz="1300" dirty="0"/>
           </a:p>
@@ -8691,18 +9297,20 @@
         </p:nvGraphicFramePr>
         <p:xfrm>
           <a:off x="640080" y="1828800"/>
-          <a:ext cx="6309360" cy="914400"/>
+          <a:ext cx="10911535" cy="914400"/>
         </p:xfrm>
         <a:graphic>
           <a:graphicData uri="http://schemas.openxmlformats.org/drawingml/2006/table">
             <a:tbl>
               <a:tblPr/>
               <a:tblGrid>
-                <a:gridCol w="2286000"/>
-                <a:gridCol w="2103120"/>
-                <a:gridCol w="1920240"/>
+                <a:gridCol w="2468880"/>
+                <a:gridCol w="1005840"/>
+                <a:gridCol w="2377440"/>
+                <a:gridCol w="2560320"/>
+                <a:gridCol w="2499055"/>
               </a:tblGrid>
-              <a:tr h="475488">
+              <a:tr h="438912">
                 <a:tc>
                   <a:txBody>
                     <a:bodyPr/>
@@ -8788,7 +9396,7 @@
                           <a:ea typeface="맑은 고딕" pitchFamily="34" charset="-122"/>
                           <a:cs typeface="맑은 고딕" pitchFamily="34" charset="-120"/>
                         </a:rPr>
-                        <a:t>총 학비</a:t>
+                        <a:t>기간</a:t>
                       </a:r>
                       <a:endParaRPr lang="en-US" sz="1250" dirty="0">
                         <a:latin typeface="맑은 고딕" charset="0"/>
@@ -8856,7 +9464,7 @@
                           <a:ea typeface="맑은 고딕" pitchFamily="34" charset="-122"/>
                           <a:cs typeface="맑은 고딕" pitchFamily="34" charset="-120"/>
                         </a:rPr>
-                        <a:t>원화 환산</a:t>
+                        <a:t>총 학비 (RM)</a:t>
                       </a:r>
                       <a:endParaRPr lang="en-US" sz="1250" dirty="0">
                         <a:latin typeface="맑은 고딕" charset="0"/>
@@ -8907,8 +9515,144 @@
                     </a:solidFill>
                   </a:tcPr>
                 </a:tc>
+                <a:tc>
+                  <a:txBody>
+                    <a:bodyPr/>
+                    <a:lstStyle/>
+                    <a:p>
+                      <a:pPr indent="0" marL="0">
+                        <a:buNone/>
+                      </a:pPr>
+                      <a:r>
+                        <a:rPr lang="en-US" sz="1250" b="1" dirty="0">
+                          <a:solidFill>
+                            <a:srgbClr val="FFFFFF"/>
+                          </a:solidFill>
+                          <a:latin typeface="맑은 고딕" pitchFamily="34" charset="0"/>
+                          <a:ea typeface="맑은 고딕" pitchFamily="34" charset="-122"/>
+                          <a:cs typeface="맑은 고딕" pitchFamily="34" charset="-120"/>
+                        </a:rPr>
+                        <a:t>총 학비 (원화)</a:t>
+                      </a:r>
+                      <a:endParaRPr lang="en-US" sz="1250" dirty="0">
+                        <a:latin typeface="맑은 고딕" charset="0"/>
+                        <a:ea typeface="맑은 고딕" charset="0"/>
+                        <a:cs typeface="맑은 고딕" charset="0"/>
+                      </a:endParaRPr>
+                    </a:p>
+                  </a:txBody>
+                  <a:tcPr marL="88900" marR="88900" marT="50800" marB="50800" anchor="ctr">
+                    <a:lnL w="6350" cap="flat" cmpd="sng" algn="ctr">
+                      <a:solidFill>
+                        <a:srgbClr val="DCD6C9"/>
+                      </a:solidFill>
+                      <a:prstDash val="solid"/>
+                      <a:round/>
+                      <a:headEnd type="none" w="med" len="med"/>
+                      <a:tailEnd type="none" w="med" len="med"/>
+                    </a:lnL>
+                    <a:lnR w="6350" cap="flat" cmpd="sng" algn="ctr">
+                      <a:solidFill>
+                        <a:srgbClr val="DCD6C9"/>
+                      </a:solidFill>
+                      <a:prstDash val="solid"/>
+                      <a:round/>
+                      <a:headEnd type="none" w="med" len="med"/>
+                      <a:tailEnd type="none" w="med" len="med"/>
+                    </a:lnR>
+                    <a:lnT w="6350" cap="flat" cmpd="sng" algn="ctr">
+                      <a:solidFill>
+                        <a:srgbClr val="DCD6C9"/>
+                      </a:solidFill>
+                      <a:prstDash val="solid"/>
+                      <a:round/>
+                      <a:headEnd type="none" w="med" len="med"/>
+                      <a:tailEnd type="none" w="med" len="med"/>
+                    </a:lnT>
+                    <a:lnB w="6350" cap="flat" cmpd="sng" algn="ctr">
+                      <a:solidFill>
+                        <a:srgbClr val="DCD6C9"/>
+                      </a:solidFill>
+                      <a:prstDash val="solid"/>
+                      <a:round/>
+                      <a:headEnd type="none" w="med" len="med"/>
+                      <a:tailEnd type="none" w="med" len="med"/>
+                    </a:lnB>
+                    <a:solidFill>
+                      <a:srgbClr val="134744"/>
+                    </a:solidFill>
+                  </a:tcPr>
+                </a:tc>
+                <a:tc>
+                  <a:txBody>
+                    <a:bodyPr/>
+                    <a:lstStyle/>
+                    <a:p>
+                      <a:pPr indent="0" marL="0">
+                        <a:buNone/>
+                      </a:pPr>
+                      <a:r>
+                        <a:rPr lang="en-US" sz="1250" b="1" dirty="0">
+                          <a:solidFill>
+                            <a:srgbClr val="FFFFFF"/>
+                          </a:solidFill>
+                          <a:latin typeface="맑은 고딕" pitchFamily="34" charset="0"/>
+                          <a:ea typeface="맑은 고딕" pitchFamily="34" charset="-122"/>
+                          <a:cs typeface="맑은 고딕" pitchFamily="34" charset="-120"/>
+                        </a:rPr>
+                        <a:t>연간 (원화)</a:t>
+                      </a:r>
+                      <a:endParaRPr lang="en-US" sz="1250" dirty="0">
+                        <a:latin typeface="맑은 고딕" charset="0"/>
+                        <a:ea typeface="맑은 고딕" charset="0"/>
+                        <a:cs typeface="맑은 고딕" charset="0"/>
+                      </a:endParaRPr>
+                    </a:p>
+                  </a:txBody>
+                  <a:tcPr marL="88900" marR="88900" marT="50800" marB="50800" anchor="ctr">
+                    <a:lnL w="6350" cap="flat" cmpd="sng" algn="ctr">
+                      <a:solidFill>
+                        <a:srgbClr val="DCD6C9"/>
+                      </a:solidFill>
+                      <a:prstDash val="solid"/>
+                      <a:round/>
+                      <a:headEnd type="none" w="med" len="med"/>
+                      <a:tailEnd type="none" w="med" len="med"/>
+                    </a:lnL>
+                    <a:lnR w="6350" cap="flat" cmpd="sng" algn="ctr">
+                      <a:solidFill>
+                        <a:srgbClr val="DCD6C9"/>
+                      </a:solidFill>
+                      <a:prstDash val="solid"/>
+                      <a:round/>
+                      <a:headEnd type="none" w="med" len="med"/>
+                      <a:tailEnd type="none" w="med" len="med"/>
+                    </a:lnR>
+                    <a:lnT w="6350" cap="flat" cmpd="sng" algn="ctr">
+                      <a:solidFill>
+                        <a:srgbClr val="DCD6C9"/>
+                      </a:solidFill>
+                      <a:prstDash val="solid"/>
+                      <a:round/>
+                      <a:headEnd type="none" w="med" len="med"/>
+                      <a:tailEnd type="none" w="med" len="med"/>
+                    </a:lnT>
+                    <a:lnB w="6350" cap="flat" cmpd="sng" algn="ctr">
+                      <a:solidFill>
+                        <a:srgbClr val="DCD6C9"/>
+                      </a:solidFill>
+                      <a:prstDash val="solid"/>
+                      <a:round/>
+                      <a:headEnd type="none" w="med" len="med"/>
+                      <a:tailEnd type="none" w="med" len="med"/>
+                    </a:lnB>
+                    <a:solidFill>
+                      <a:srgbClr val="134744"/>
+                    </a:solidFill>
+                  </a:tcPr>
+                </a:tc>
               </a:tr>
-              <a:tr h="475488">
+              <a:tr h="438912">
                 <a:tc>
                   <a:txBody>
                     <a:bodyPr/>
@@ -8926,7 +9670,7 @@
                           <a:ea typeface="맑은 고딕" pitchFamily="34" charset="-122"/>
                           <a:cs typeface="맑은 고딕" pitchFamily="34" charset="-120"/>
                         </a:rPr>
-                        <a:t>파운데이션 1년</a:t>
+                        <a:t>파운데이션</a:t>
                       </a:r>
                       <a:endParaRPr lang="en-US" sz="1250" dirty="0">
                         <a:latin typeface="맑은 고딕" charset="0"/>
@@ -8994,7 +9738,7 @@
                           <a:ea typeface="맑은 고딕" pitchFamily="34" charset="-122"/>
                           <a:cs typeface="맑은 고딕" pitchFamily="34" charset="-120"/>
                         </a:rPr>
-                        <a:t>RM 17,850~29,350</a:t>
+                        <a:t>1년</a:t>
                       </a:r>
                       <a:endParaRPr lang="en-US" sz="1250" dirty="0">
                         <a:latin typeface="맑은 고딕" charset="0"/>
@@ -9062,7 +9806,7 @@
                           <a:ea typeface="맑은 고딕" pitchFamily="34" charset="-122"/>
                           <a:cs typeface="맑은 고딕" pitchFamily="34" charset="-120"/>
                         </a:rPr>
-                        <a:t>약 610만~990만 원</a:t>
+                        <a:t>17,850~29,350</a:t>
                       </a:r>
                       <a:endParaRPr lang="en-US" sz="1250" dirty="0">
                         <a:latin typeface="맑은 고딕" charset="0"/>
@@ -9113,8 +9857,6 @@
                     </a:solidFill>
                   </a:tcPr>
                 </a:tc>
-              </a:tr>
-              <a:tr h="475488">
                 <a:tc>
                   <a:txBody>
                     <a:bodyPr/>
@@ -9132,7 +9874,145 @@
                           <a:ea typeface="맑은 고딕" pitchFamily="34" charset="-122"/>
                           <a:cs typeface="맑은 고딕" pitchFamily="34" charset="-120"/>
                         </a:rPr>
-                        <a:t>학사 경영계열 1년</a:t>
+                        <a:t>약 610만~990만</a:t>
+                      </a:r>
+                      <a:endParaRPr lang="en-US" sz="1250" dirty="0">
+                        <a:latin typeface="맑은 고딕" charset="0"/>
+                        <a:ea typeface="맑은 고딕" charset="0"/>
+                        <a:cs typeface="맑은 고딕" charset="0"/>
+                      </a:endParaRPr>
+                    </a:p>
+                  </a:txBody>
+                  <a:tcPr marL="88900" marR="88900" marT="50800" marB="50800" anchor="ctr">
+                    <a:lnL w="6350" cap="flat" cmpd="sng" algn="ctr">
+                      <a:solidFill>
+                        <a:srgbClr val="DCD6C9"/>
+                      </a:solidFill>
+                      <a:prstDash val="solid"/>
+                      <a:round/>
+                      <a:headEnd type="none" w="med" len="med"/>
+                      <a:tailEnd type="none" w="med" len="med"/>
+                    </a:lnL>
+                    <a:lnR w="6350" cap="flat" cmpd="sng" algn="ctr">
+                      <a:solidFill>
+                        <a:srgbClr val="DCD6C9"/>
+                      </a:solidFill>
+                      <a:prstDash val="solid"/>
+                      <a:round/>
+                      <a:headEnd type="none" w="med" len="med"/>
+                      <a:tailEnd type="none" w="med" len="med"/>
+                    </a:lnR>
+                    <a:lnT w="6350" cap="flat" cmpd="sng" algn="ctr">
+                      <a:solidFill>
+                        <a:srgbClr val="DCD6C9"/>
+                      </a:solidFill>
+                      <a:prstDash val="solid"/>
+                      <a:round/>
+                      <a:headEnd type="none" w="med" len="med"/>
+                      <a:tailEnd type="none" w="med" len="med"/>
+                    </a:lnT>
+                    <a:lnB w="6350" cap="flat" cmpd="sng" algn="ctr">
+                      <a:solidFill>
+                        <a:srgbClr val="DCD6C9"/>
+                      </a:solidFill>
+                      <a:prstDash val="solid"/>
+                      <a:round/>
+                      <a:headEnd type="none" w="med" len="med"/>
+                      <a:tailEnd type="none" w="med" len="med"/>
+                    </a:lnB>
+                    <a:solidFill>
+                      <a:srgbClr val="FFFFFF"/>
+                    </a:solidFill>
+                  </a:tcPr>
+                </a:tc>
+                <a:tc>
+                  <a:txBody>
+                    <a:bodyPr/>
+                    <a:lstStyle/>
+                    <a:p>
+                      <a:pPr indent="0" marL="0">
+                        <a:buNone/>
+                      </a:pPr>
+                      <a:r>
+                        <a:rPr lang="en-US" sz="1250" dirty="0">
+                          <a:solidFill>
+                            <a:srgbClr val="1B2426"/>
+                          </a:solidFill>
+                          <a:latin typeface="맑은 고딕" pitchFamily="34" charset="0"/>
+                          <a:ea typeface="맑은 고딕" pitchFamily="34" charset="-122"/>
+                          <a:cs typeface="맑은 고딕" pitchFamily="34" charset="-120"/>
+                        </a:rPr>
+                        <a:t>약 610만~990만</a:t>
+                      </a:r>
+                      <a:endParaRPr lang="en-US" sz="1250" dirty="0">
+                        <a:latin typeface="맑은 고딕" charset="0"/>
+                        <a:ea typeface="맑은 고딕" charset="0"/>
+                        <a:cs typeface="맑은 고딕" charset="0"/>
+                      </a:endParaRPr>
+                    </a:p>
+                  </a:txBody>
+                  <a:tcPr marL="88900" marR="88900" marT="50800" marB="50800" anchor="ctr">
+                    <a:lnL w="6350" cap="flat" cmpd="sng" algn="ctr">
+                      <a:solidFill>
+                        <a:srgbClr val="DCD6C9"/>
+                      </a:solidFill>
+                      <a:prstDash val="solid"/>
+                      <a:round/>
+                      <a:headEnd type="none" w="med" len="med"/>
+                      <a:tailEnd type="none" w="med" len="med"/>
+                    </a:lnL>
+                    <a:lnR w="6350" cap="flat" cmpd="sng" algn="ctr">
+                      <a:solidFill>
+                        <a:srgbClr val="DCD6C9"/>
+                      </a:solidFill>
+                      <a:prstDash val="solid"/>
+                      <a:round/>
+                      <a:headEnd type="none" w="med" len="med"/>
+                      <a:tailEnd type="none" w="med" len="med"/>
+                    </a:lnR>
+                    <a:lnT w="6350" cap="flat" cmpd="sng" algn="ctr">
+                      <a:solidFill>
+                        <a:srgbClr val="DCD6C9"/>
+                      </a:solidFill>
+                      <a:prstDash val="solid"/>
+                      <a:round/>
+                      <a:headEnd type="none" w="med" len="med"/>
+                      <a:tailEnd type="none" w="med" len="med"/>
+                    </a:lnT>
+                    <a:lnB w="6350" cap="flat" cmpd="sng" algn="ctr">
+                      <a:solidFill>
+                        <a:srgbClr val="DCD6C9"/>
+                      </a:solidFill>
+                      <a:prstDash val="solid"/>
+                      <a:round/>
+                      <a:headEnd type="none" w="med" len="med"/>
+                      <a:tailEnd type="none" w="med" len="med"/>
+                    </a:lnB>
+                    <a:solidFill>
+                      <a:srgbClr val="FFFFFF"/>
+                    </a:solidFill>
+                  </a:tcPr>
+                </a:tc>
+              </a:tr>
+              <a:tr h="438912">
+                <a:tc>
+                  <a:txBody>
+                    <a:bodyPr/>
+                    <a:lstStyle/>
+                    <a:p>
+                      <a:pPr indent="0" marL="0">
+                        <a:buNone/>
+                      </a:pPr>
+                      <a:r>
+                        <a:rPr lang="en-US" sz="1250" dirty="0">
+                          <a:solidFill>
+                            <a:srgbClr val="1B2426"/>
+                          </a:solidFill>
+                          <a:latin typeface="맑은 고딕" pitchFamily="34" charset="0"/>
+                          <a:ea typeface="맑은 고딕" pitchFamily="34" charset="-122"/>
+                          <a:cs typeface="맑은 고딕" pitchFamily="34" charset="-120"/>
+                        </a:rPr>
+                        <a:t>경영계열</a:t>
                       </a:r>
                       <a:endParaRPr lang="en-US" sz="1250" dirty="0">
                         <a:latin typeface="맑은 고딕" charset="0"/>
@@ -9200,7 +10080,7 @@
                           <a:ea typeface="맑은 고딕" pitchFamily="34" charset="-122"/>
                           <a:cs typeface="맑은 고딕" pitchFamily="34" charset="-120"/>
                         </a:rPr>
-                        <a:t>USD 6,820~9,091</a:t>
+                        <a:t>3년</a:t>
                       </a:r>
                       <a:endParaRPr lang="en-US" sz="1250" dirty="0">
                         <a:latin typeface="맑은 고딕" charset="0"/>
@@ -9268,7 +10148,7 @@
                           <a:ea typeface="맑은 고딕" pitchFamily="34" charset="-122"/>
                           <a:cs typeface="맑은 고딕" pitchFamily="34" charset="-120"/>
                         </a:rPr>
-                        <a:t>약 910만~1,290만 원</a:t>
+                        <a:t>80,400~114,150</a:t>
                       </a:r>
                       <a:endParaRPr lang="en-US" sz="1250" dirty="0">
                         <a:latin typeface="맑은 고딕" charset="0"/>
@@ -9319,8 +10199,6 @@
                     </a:solidFill>
                   </a:tcPr>
                 </a:tc>
-              </a:tr>
-              <a:tr h="475488">
                 <a:tc>
                   <a:txBody>
                     <a:bodyPr/>
@@ -9338,7 +10216,145 @@
                           <a:ea typeface="맑은 고딕" pitchFamily="34" charset="-122"/>
                           <a:cs typeface="맑은 고딕" pitchFamily="34" charset="-120"/>
                         </a:rPr>
-                        <a:t>학사 공학계열 1년</a:t>
+                        <a:t>약 2,730만~3,870만</a:t>
+                      </a:r>
+                      <a:endParaRPr lang="en-US" sz="1250" dirty="0">
+                        <a:latin typeface="맑은 고딕" charset="0"/>
+                        <a:ea typeface="맑은 고딕" charset="0"/>
+                        <a:cs typeface="맑은 고딕" charset="0"/>
+                      </a:endParaRPr>
+                    </a:p>
+                  </a:txBody>
+                  <a:tcPr marL="88900" marR="88900" marT="50800" marB="50800" anchor="ctr">
+                    <a:lnL w="6350" cap="flat" cmpd="sng" algn="ctr">
+                      <a:solidFill>
+                        <a:srgbClr val="DCD6C9"/>
+                      </a:solidFill>
+                      <a:prstDash val="solid"/>
+                      <a:round/>
+                      <a:headEnd type="none" w="med" len="med"/>
+                      <a:tailEnd type="none" w="med" len="med"/>
+                    </a:lnL>
+                    <a:lnR w="6350" cap="flat" cmpd="sng" algn="ctr">
+                      <a:solidFill>
+                        <a:srgbClr val="DCD6C9"/>
+                      </a:solidFill>
+                      <a:prstDash val="solid"/>
+                      <a:round/>
+                      <a:headEnd type="none" w="med" len="med"/>
+                      <a:tailEnd type="none" w="med" len="med"/>
+                    </a:lnR>
+                    <a:lnT w="6350" cap="flat" cmpd="sng" algn="ctr">
+                      <a:solidFill>
+                        <a:srgbClr val="DCD6C9"/>
+                      </a:solidFill>
+                      <a:prstDash val="solid"/>
+                      <a:round/>
+                      <a:headEnd type="none" w="med" len="med"/>
+                      <a:tailEnd type="none" w="med" len="med"/>
+                    </a:lnT>
+                    <a:lnB w="6350" cap="flat" cmpd="sng" algn="ctr">
+                      <a:solidFill>
+                        <a:srgbClr val="DCD6C9"/>
+                      </a:solidFill>
+                      <a:prstDash val="solid"/>
+                      <a:round/>
+                      <a:headEnd type="none" w="med" len="med"/>
+                      <a:tailEnd type="none" w="med" len="med"/>
+                    </a:lnB>
+                    <a:solidFill>
+                      <a:srgbClr val="F1EDE4"/>
+                    </a:solidFill>
+                  </a:tcPr>
+                </a:tc>
+                <a:tc>
+                  <a:txBody>
+                    <a:bodyPr/>
+                    <a:lstStyle/>
+                    <a:p>
+                      <a:pPr indent="0" marL="0">
+                        <a:buNone/>
+                      </a:pPr>
+                      <a:r>
+                        <a:rPr lang="en-US" sz="1250" dirty="0">
+                          <a:solidFill>
+                            <a:srgbClr val="1B2426"/>
+                          </a:solidFill>
+                          <a:latin typeface="맑은 고딕" pitchFamily="34" charset="0"/>
+                          <a:ea typeface="맑은 고딕" pitchFamily="34" charset="-122"/>
+                          <a:cs typeface="맑은 고딕" pitchFamily="34" charset="-120"/>
+                        </a:rPr>
+                        <a:t>약 910만~1,290만</a:t>
+                      </a:r>
+                      <a:endParaRPr lang="en-US" sz="1250" dirty="0">
+                        <a:latin typeface="맑은 고딕" charset="0"/>
+                        <a:ea typeface="맑은 고딕" charset="0"/>
+                        <a:cs typeface="맑은 고딕" charset="0"/>
+                      </a:endParaRPr>
+                    </a:p>
+                  </a:txBody>
+                  <a:tcPr marL="88900" marR="88900" marT="50800" marB="50800" anchor="ctr">
+                    <a:lnL w="6350" cap="flat" cmpd="sng" algn="ctr">
+                      <a:solidFill>
+                        <a:srgbClr val="DCD6C9"/>
+                      </a:solidFill>
+                      <a:prstDash val="solid"/>
+                      <a:round/>
+                      <a:headEnd type="none" w="med" len="med"/>
+                      <a:tailEnd type="none" w="med" len="med"/>
+                    </a:lnL>
+                    <a:lnR w="6350" cap="flat" cmpd="sng" algn="ctr">
+                      <a:solidFill>
+                        <a:srgbClr val="DCD6C9"/>
+                      </a:solidFill>
+                      <a:prstDash val="solid"/>
+                      <a:round/>
+                      <a:headEnd type="none" w="med" len="med"/>
+                      <a:tailEnd type="none" w="med" len="med"/>
+                    </a:lnR>
+                    <a:lnT w="6350" cap="flat" cmpd="sng" algn="ctr">
+                      <a:solidFill>
+                        <a:srgbClr val="DCD6C9"/>
+                      </a:solidFill>
+                      <a:prstDash val="solid"/>
+                      <a:round/>
+                      <a:headEnd type="none" w="med" len="med"/>
+                      <a:tailEnd type="none" w="med" len="med"/>
+                    </a:lnT>
+                    <a:lnB w="6350" cap="flat" cmpd="sng" algn="ctr">
+                      <a:solidFill>
+                        <a:srgbClr val="DCD6C9"/>
+                      </a:solidFill>
+                      <a:prstDash val="solid"/>
+                      <a:round/>
+                      <a:headEnd type="none" w="med" len="med"/>
+                      <a:tailEnd type="none" w="med" len="med"/>
+                    </a:lnB>
+                    <a:solidFill>
+                      <a:srgbClr val="F1EDE4"/>
+                    </a:solidFill>
+                  </a:tcPr>
+                </a:tc>
+              </a:tr>
+              <a:tr h="438912">
+                <a:tc>
+                  <a:txBody>
+                    <a:bodyPr/>
+                    <a:lstStyle/>
+                    <a:p>
+                      <a:pPr indent="0" marL="0">
+                        <a:buNone/>
+                      </a:pPr>
+                      <a:r>
+                        <a:rPr lang="en-US" sz="1250" dirty="0">
+                          <a:solidFill>
+                            <a:srgbClr val="1B2426"/>
+                          </a:solidFill>
+                          <a:latin typeface="맑은 고딕" pitchFamily="34" charset="0"/>
+                          <a:ea typeface="맑은 고딕" pitchFamily="34" charset="-122"/>
+                          <a:cs typeface="맑은 고딕" pitchFamily="34" charset="-120"/>
+                        </a:rPr>
+                        <a:t>공학계열</a:t>
                       </a:r>
                       <a:endParaRPr lang="en-US" sz="1250" dirty="0">
                         <a:latin typeface="맑은 고딕" charset="0"/>
@@ -9406,7 +10422,7 @@
                           <a:ea typeface="맑은 고딕" pitchFamily="34" charset="-122"/>
                           <a:cs typeface="맑은 고딕" pitchFamily="34" charset="-120"/>
                         </a:rPr>
-                        <a:t>RM 38,392</a:t>
+                        <a:t>4년</a:t>
                       </a:r>
                       <a:endParaRPr lang="en-US" sz="1250" dirty="0">
                         <a:latin typeface="맑은 고딕" charset="0"/>
@@ -9474,7 +10490,7 @@
                           <a:ea typeface="맑은 고딕" pitchFamily="34" charset="-122"/>
                           <a:cs typeface="맑은 고딕" pitchFamily="34" charset="-120"/>
                         </a:rPr>
-                        <a:t>약 1,300만~1,400만 원</a:t>
+                        <a:t>153,568</a:t>
                       </a:r>
                       <a:endParaRPr lang="en-US" sz="1250" dirty="0">
                         <a:latin typeface="맑은 고딕" charset="0"/>
@@ -9525,6 +10541,484 @@
                     </a:solidFill>
                   </a:tcPr>
                 </a:tc>
+                <a:tc>
+                  <a:txBody>
+                    <a:bodyPr/>
+                    <a:lstStyle/>
+                    <a:p>
+                      <a:pPr indent="0" marL="0">
+                        <a:buNone/>
+                      </a:pPr>
+                      <a:r>
+                        <a:rPr lang="en-US" sz="1250" dirty="0">
+                          <a:solidFill>
+                            <a:srgbClr val="1B2426"/>
+                          </a:solidFill>
+                          <a:latin typeface="맑은 고딕" pitchFamily="34" charset="0"/>
+                          <a:ea typeface="맑은 고딕" pitchFamily="34" charset="-122"/>
+                          <a:cs typeface="맑은 고딕" pitchFamily="34" charset="-120"/>
+                        </a:rPr>
+                        <a:t>약 5,210만</a:t>
+                      </a:r>
+                      <a:endParaRPr lang="en-US" sz="1250" dirty="0">
+                        <a:latin typeface="맑은 고딕" charset="0"/>
+                        <a:ea typeface="맑은 고딕" charset="0"/>
+                        <a:cs typeface="맑은 고딕" charset="0"/>
+                      </a:endParaRPr>
+                    </a:p>
+                  </a:txBody>
+                  <a:tcPr marL="88900" marR="88900" marT="50800" marB="50800" anchor="ctr">
+                    <a:lnL w="6350" cap="flat" cmpd="sng" algn="ctr">
+                      <a:solidFill>
+                        <a:srgbClr val="DCD6C9"/>
+                      </a:solidFill>
+                      <a:prstDash val="solid"/>
+                      <a:round/>
+                      <a:headEnd type="none" w="med" len="med"/>
+                      <a:tailEnd type="none" w="med" len="med"/>
+                    </a:lnL>
+                    <a:lnR w="6350" cap="flat" cmpd="sng" algn="ctr">
+                      <a:solidFill>
+                        <a:srgbClr val="DCD6C9"/>
+                      </a:solidFill>
+                      <a:prstDash val="solid"/>
+                      <a:round/>
+                      <a:headEnd type="none" w="med" len="med"/>
+                      <a:tailEnd type="none" w="med" len="med"/>
+                    </a:lnR>
+                    <a:lnT w="6350" cap="flat" cmpd="sng" algn="ctr">
+                      <a:solidFill>
+                        <a:srgbClr val="DCD6C9"/>
+                      </a:solidFill>
+                      <a:prstDash val="solid"/>
+                      <a:round/>
+                      <a:headEnd type="none" w="med" len="med"/>
+                      <a:tailEnd type="none" w="med" len="med"/>
+                    </a:lnT>
+                    <a:lnB w="6350" cap="flat" cmpd="sng" algn="ctr">
+                      <a:solidFill>
+                        <a:srgbClr val="DCD6C9"/>
+                      </a:solidFill>
+                      <a:prstDash val="solid"/>
+                      <a:round/>
+                      <a:headEnd type="none" w="med" len="med"/>
+                      <a:tailEnd type="none" w="med" len="med"/>
+                    </a:lnB>
+                    <a:solidFill>
+                      <a:srgbClr val="FFFFFF"/>
+                    </a:solidFill>
+                  </a:tcPr>
+                </a:tc>
+                <a:tc>
+                  <a:txBody>
+                    <a:bodyPr/>
+                    <a:lstStyle/>
+                    <a:p>
+                      <a:pPr indent="0" marL="0">
+                        <a:buNone/>
+                      </a:pPr>
+                      <a:r>
+                        <a:rPr lang="en-US" sz="1250" dirty="0">
+                          <a:solidFill>
+                            <a:srgbClr val="1B2426"/>
+                          </a:solidFill>
+                          <a:latin typeface="맑은 고딕" pitchFamily="34" charset="0"/>
+                          <a:ea typeface="맑은 고딕" pitchFamily="34" charset="-122"/>
+                          <a:cs typeface="맑은 고딕" pitchFamily="34" charset="-120"/>
+                        </a:rPr>
+                        <a:t>약 1,300만</a:t>
+                      </a:r>
+                      <a:endParaRPr lang="en-US" sz="1250" dirty="0">
+                        <a:latin typeface="맑은 고딕" charset="0"/>
+                        <a:ea typeface="맑은 고딕" charset="0"/>
+                        <a:cs typeface="맑은 고딕" charset="0"/>
+                      </a:endParaRPr>
+                    </a:p>
+                  </a:txBody>
+                  <a:tcPr marL="88900" marR="88900" marT="50800" marB="50800" anchor="ctr">
+                    <a:lnL w="6350" cap="flat" cmpd="sng" algn="ctr">
+                      <a:solidFill>
+                        <a:srgbClr val="DCD6C9"/>
+                      </a:solidFill>
+                      <a:prstDash val="solid"/>
+                      <a:round/>
+                      <a:headEnd type="none" w="med" len="med"/>
+                      <a:tailEnd type="none" w="med" len="med"/>
+                    </a:lnL>
+                    <a:lnR w="6350" cap="flat" cmpd="sng" algn="ctr">
+                      <a:solidFill>
+                        <a:srgbClr val="DCD6C9"/>
+                      </a:solidFill>
+                      <a:prstDash val="solid"/>
+                      <a:round/>
+                      <a:headEnd type="none" w="med" len="med"/>
+                      <a:tailEnd type="none" w="med" len="med"/>
+                    </a:lnR>
+                    <a:lnT w="6350" cap="flat" cmpd="sng" algn="ctr">
+                      <a:solidFill>
+                        <a:srgbClr val="DCD6C9"/>
+                      </a:solidFill>
+                      <a:prstDash val="solid"/>
+                      <a:round/>
+                      <a:headEnd type="none" w="med" len="med"/>
+                      <a:tailEnd type="none" w="med" len="med"/>
+                    </a:lnT>
+                    <a:lnB w="6350" cap="flat" cmpd="sng" algn="ctr">
+                      <a:solidFill>
+                        <a:srgbClr val="DCD6C9"/>
+                      </a:solidFill>
+                      <a:prstDash val="solid"/>
+                      <a:round/>
+                      <a:headEnd type="none" w="med" len="med"/>
+                      <a:tailEnd type="none" w="med" len="med"/>
+                    </a:lnB>
+                    <a:solidFill>
+                      <a:srgbClr val="FFFFFF"/>
+                    </a:solidFill>
+                  </a:tcPr>
+                </a:tc>
+              </a:tr>
+              <a:tr h="438912">
+                <a:tc>
+                  <a:txBody>
+                    <a:bodyPr/>
+                    <a:lstStyle/>
+                    <a:p>
+                      <a:pPr indent="0" marL="0">
+                        <a:buNone/>
+                      </a:pPr>
+                      <a:r>
+                        <a:rPr lang="en-US" sz="1250" dirty="0">
+                          <a:solidFill>
+                            <a:srgbClr val="1B2426"/>
+                          </a:solidFill>
+                          <a:latin typeface="맑은 고딕" pitchFamily="34" charset="0"/>
+                          <a:ea typeface="맑은 고딕" pitchFamily="34" charset="-122"/>
+                          <a:cs typeface="맑은 고딕" pitchFamily="34" charset="-120"/>
+                        </a:rPr>
+                        <a:t>파운데이션 + 공학</a:t>
+                      </a:r>
+                      <a:endParaRPr lang="en-US" sz="1250" dirty="0">
+                        <a:latin typeface="맑은 고딕" charset="0"/>
+                        <a:ea typeface="맑은 고딕" charset="0"/>
+                        <a:cs typeface="맑은 고딕" charset="0"/>
+                      </a:endParaRPr>
+                    </a:p>
+                  </a:txBody>
+                  <a:tcPr marL="88900" marR="88900" marT="50800" marB="50800" anchor="ctr">
+                    <a:lnL w="6350" cap="flat" cmpd="sng" algn="ctr">
+                      <a:solidFill>
+                        <a:srgbClr val="DCD6C9"/>
+                      </a:solidFill>
+                      <a:prstDash val="solid"/>
+                      <a:round/>
+                      <a:headEnd type="none" w="med" len="med"/>
+                      <a:tailEnd type="none" w="med" len="med"/>
+                    </a:lnL>
+                    <a:lnR w="6350" cap="flat" cmpd="sng" algn="ctr">
+                      <a:solidFill>
+                        <a:srgbClr val="DCD6C9"/>
+                      </a:solidFill>
+                      <a:prstDash val="solid"/>
+                      <a:round/>
+                      <a:headEnd type="none" w="med" len="med"/>
+                      <a:tailEnd type="none" w="med" len="med"/>
+                    </a:lnR>
+                    <a:lnT w="6350" cap="flat" cmpd="sng" algn="ctr">
+                      <a:solidFill>
+                        <a:srgbClr val="DCD6C9"/>
+                      </a:solidFill>
+                      <a:prstDash val="solid"/>
+                      <a:round/>
+                      <a:headEnd type="none" w="med" len="med"/>
+                      <a:tailEnd type="none" w="med" len="med"/>
+                    </a:lnT>
+                    <a:lnB w="6350" cap="flat" cmpd="sng" algn="ctr">
+                      <a:solidFill>
+                        <a:srgbClr val="DCD6C9"/>
+                      </a:solidFill>
+                      <a:prstDash val="solid"/>
+                      <a:round/>
+                      <a:headEnd type="none" w="med" len="med"/>
+                      <a:tailEnd type="none" w="med" len="med"/>
+                    </a:lnB>
+                    <a:solidFill>
+                      <a:srgbClr val="F1EDE4"/>
+                    </a:solidFill>
+                  </a:tcPr>
+                </a:tc>
+                <a:tc>
+                  <a:txBody>
+                    <a:bodyPr/>
+                    <a:lstStyle/>
+                    <a:p>
+                      <a:pPr indent="0" marL="0">
+                        <a:buNone/>
+                      </a:pPr>
+                      <a:r>
+                        <a:rPr lang="en-US" sz="1250" dirty="0">
+                          <a:solidFill>
+                            <a:srgbClr val="1B2426"/>
+                          </a:solidFill>
+                          <a:latin typeface="맑은 고딕" pitchFamily="34" charset="0"/>
+                          <a:ea typeface="맑은 고딕" pitchFamily="34" charset="-122"/>
+                          <a:cs typeface="맑은 고딕" pitchFamily="34" charset="-120"/>
+                        </a:rPr>
+                        <a:t>5년</a:t>
+                      </a:r>
+                      <a:endParaRPr lang="en-US" sz="1250" dirty="0">
+                        <a:latin typeface="맑은 고딕" charset="0"/>
+                        <a:ea typeface="맑은 고딕" charset="0"/>
+                        <a:cs typeface="맑은 고딕" charset="0"/>
+                      </a:endParaRPr>
+                    </a:p>
+                  </a:txBody>
+                  <a:tcPr marL="88900" marR="88900" marT="50800" marB="50800" anchor="ctr">
+                    <a:lnL w="6350" cap="flat" cmpd="sng" algn="ctr">
+                      <a:solidFill>
+                        <a:srgbClr val="DCD6C9"/>
+                      </a:solidFill>
+                      <a:prstDash val="solid"/>
+                      <a:round/>
+                      <a:headEnd type="none" w="med" len="med"/>
+                      <a:tailEnd type="none" w="med" len="med"/>
+                    </a:lnL>
+                    <a:lnR w="6350" cap="flat" cmpd="sng" algn="ctr">
+                      <a:solidFill>
+                        <a:srgbClr val="DCD6C9"/>
+                      </a:solidFill>
+                      <a:prstDash val="solid"/>
+                      <a:round/>
+                      <a:headEnd type="none" w="med" len="med"/>
+                      <a:tailEnd type="none" w="med" len="med"/>
+                    </a:lnR>
+                    <a:lnT w="6350" cap="flat" cmpd="sng" algn="ctr">
+                      <a:solidFill>
+                        <a:srgbClr val="DCD6C9"/>
+                      </a:solidFill>
+                      <a:prstDash val="solid"/>
+                      <a:round/>
+                      <a:headEnd type="none" w="med" len="med"/>
+                      <a:tailEnd type="none" w="med" len="med"/>
+                    </a:lnT>
+                    <a:lnB w="6350" cap="flat" cmpd="sng" algn="ctr">
+                      <a:solidFill>
+                        <a:srgbClr val="DCD6C9"/>
+                      </a:solidFill>
+                      <a:prstDash val="solid"/>
+                      <a:round/>
+                      <a:headEnd type="none" w="med" len="med"/>
+                      <a:tailEnd type="none" w="med" len="med"/>
+                    </a:lnB>
+                    <a:solidFill>
+                      <a:srgbClr val="F1EDE4"/>
+                    </a:solidFill>
+                  </a:tcPr>
+                </a:tc>
+                <a:tc>
+                  <a:txBody>
+                    <a:bodyPr/>
+                    <a:lstStyle/>
+                    <a:p>
+                      <a:pPr indent="0" marL="0">
+                        <a:buNone/>
+                      </a:pPr>
+                      <a:r>
+                        <a:rPr lang="en-US" sz="1250" dirty="0">
+                          <a:solidFill>
+                            <a:srgbClr val="1B2426"/>
+                          </a:solidFill>
+                          <a:latin typeface="맑은 고딕" pitchFamily="34" charset="0"/>
+                          <a:ea typeface="맑은 고딕" pitchFamily="34" charset="-122"/>
+                          <a:cs typeface="맑은 고딕" pitchFamily="34" charset="-120"/>
+                        </a:rPr>
+                        <a:t>171,418~182,918</a:t>
+                      </a:r>
+                      <a:endParaRPr lang="en-US" sz="1250" dirty="0">
+                        <a:latin typeface="맑은 고딕" charset="0"/>
+                        <a:ea typeface="맑은 고딕" charset="0"/>
+                        <a:cs typeface="맑은 고딕" charset="0"/>
+                      </a:endParaRPr>
+                    </a:p>
+                  </a:txBody>
+                  <a:tcPr marL="88900" marR="88900" marT="50800" marB="50800" anchor="ctr">
+                    <a:lnL w="6350" cap="flat" cmpd="sng" algn="ctr">
+                      <a:solidFill>
+                        <a:srgbClr val="DCD6C9"/>
+                      </a:solidFill>
+                      <a:prstDash val="solid"/>
+                      <a:round/>
+                      <a:headEnd type="none" w="med" len="med"/>
+                      <a:tailEnd type="none" w="med" len="med"/>
+                    </a:lnL>
+                    <a:lnR w="6350" cap="flat" cmpd="sng" algn="ctr">
+                      <a:solidFill>
+                        <a:srgbClr val="DCD6C9"/>
+                      </a:solidFill>
+                      <a:prstDash val="solid"/>
+                      <a:round/>
+                      <a:headEnd type="none" w="med" len="med"/>
+                      <a:tailEnd type="none" w="med" len="med"/>
+                    </a:lnR>
+                    <a:lnT w="6350" cap="flat" cmpd="sng" algn="ctr">
+                      <a:solidFill>
+                        <a:srgbClr val="DCD6C9"/>
+                      </a:solidFill>
+                      <a:prstDash val="solid"/>
+                      <a:round/>
+                      <a:headEnd type="none" w="med" len="med"/>
+                      <a:tailEnd type="none" w="med" len="med"/>
+                    </a:lnT>
+                    <a:lnB w="6350" cap="flat" cmpd="sng" algn="ctr">
+                      <a:solidFill>
+                        <a:srgbClr val="DCD6C9"/>
+                      </a:solidFill>
+                      <a:prstDash val="solid"/>
+                      <a:round/>
+                      <a:headEnd type="none" w="med" len="med"/>
+                      <a:tailEnd type="none" w="med" len="med"/>
+                    </a:lnB>
+                    <a:solidFill>
+                      <a:srgbClr val="F1EDE4"/>
+                    </a:solidFill>
+                  </a:tcPr>
+                </a:tc>
+                <a:tc>
+                  <a:txBody>
+                    <a:bodyPr/>
+                    <a:lstStyle/>
+                    <a:p>
+                      <a:pPr indent="0" marL="0">
+                        <a:buNone/>
+                      </a:pPr>
+                      <a:r>
+                        <a:rPr lang="en-US" sz="1250" dirty="0">
+                          <a:solidFill>
+                            <a:srgbClr val="1B2426"/>
+                          </a:solidFill>
+                          <a:latin typeface="맑은 고딕" pitchFamily="34" charset="0"/>
+                          <a:ea typeface="맑은 고딕" pitchFamily="34" charset="-122"/>
+                          <a:cs typeface="맑은 고딕" pitchFamily="34" charset="-120"/>
+                        </a:rPr>
+                        <a:t>약 5,810만~6,200만</a:t>
+                      </a:r>
+                      <a:endParaRPr lang="en-US" sz="1250" dirty="0">
+                        <a:latin typeface="맑은 고딕" charset="0"/>
+                        <a:ea typeface="맑은 고딕" charset="0"/>
+                        <a:cs typeface="맑은 고딕" charset="0"/>
+                      </a:endParaRPr>
+                    </a:p>
+                  </a:txBody>
+                  <a:tcPr marL="88900" marR="88900" marT="50800" marB="50800" anchor="ctr">
+                    <a:lnL w="6350" cap="flat" cmpd="sng" algn="ctr">
+                      <a:solidFill>
+                        <a:srgbClr val="DCD6C9"/>
+                      </a:solidFill>
+                      <a:prstDash val="solid"/>
+                      <a:round/>
+                      <a:headEnd type="none" w="med" len="med"/>
+                      <a:tailEnd type="none" w="med" len="med"/>
+                    </a:lnL>
+                    <a:lnR w="6350" cap="flat" cmpd="sng" algn="ctr">
+                      <a:solidFill>
+                        <a:srgbClr val="DCD6C9"/>
+                      </a:solidFill>
+                      <a:prstDash val="solid"/>
+                      <a:round/>
+                      <a:headEnd type="none" w="med" len="med"/>
+                      <a:tailEnd type="none" w="med" len="med"/>
+                    </a:lnR>
+                    <a:lnT w="6350" cap="flat" cmpd="sng" algn="ctr">
+                      <a:solidFill>
+                        <a:srgbClr val="DCD6C9"/>
+                      </a:solidFill>
+                      <a:prstDash val="solid"/>
+                      <a:round/>
+                      <a:headEnd type="none" w="med" len="med"/>
+                      <a:tailEnd type="none" w="med" len="med"/>
+                    </a:lnT>
+                    <a:lnB w="6350" cap="flat" cmpd="sng" algn="ctr">
+                      <a:solidFill>
+                        <a:srgbClr val="DCD6C9"/>
+                      </a:solidFill>
+                      <a:prstDash val="solid"/>
+                      <a:round/>
+                      <a:headEnd type="none" w="med" len="med"/>
+                      <a:tailEnd type="none" w="med" len="med"/>
+                    </a:lnB>
+                    <a:solidFill>
+                      <a:srgbClr val="F1EDE4"/>
+                    </a:solidFill>
+                  </a:tcPr>
+                </a:tc>
+                <a:tc>
+                  <a:txBody>
+                    <a:bodyPr/>
+                    <a:lstStyle/>
+                    <a:p>
+                      <a:pPr indent="0" marL="0">
+                        <a:buNone/>
+                      </a:pPr>
+                      <a:r>
+                        <a:rPr lang="en-US" sz="1250" dirty="0">
+                          <a:solidFill>
+                            <a:srgbClr val="1B2426"/>
+                          </a:solidFill>
+                          <a:latin typeface="맑은 고딕" pitchFamily="34" charset="0"/>
+                          <a:ea typeface="맑은 고딕" pitchFamily="34" charset="-122"/>
+                          <a:cs typeface="맑은 고딕" pitchFamily="34" charset="-120"/>
+                        </a:rPr>
+                        <a:t>약 1,160만~1,240만</a:t>
+                      </a:r>
+                      <a:endParaRPr lang="en-US" sz="1250" dirty="0">
+                        <a:latin typeface="맑은 고딕" charset="0"/>
+                        <a:ea typeface="맑은 고딕" charset="0"/>
+                        <a:cs typeface="맑은 고딕" charset="0"/>
+                      </a:endParaRPr>
+                    </a:p>
+                  </a:txBody>
+                  <a:tcPr marL="88900" marR="88900" marT="50800" marB="50800" anchor="ctr">
+                    <a:lnL w="6350" cap="flat" cmpd="sng" algn="ctr">
+                      <a:solidFill>
+                        <a:srgbClr val="DCD6C9"/>
+                      </a:solidFill>
+                      <a:prstDash val="solid"/>
+                      <a:round/>
+                      <a:headEnd type="none" w="med" len="med"/>
+                      <a:tailEnd type="none" w="med" len="med"/>
+                    </a:lnL>
+                    <a:lnR w="6350" cap="flat" cmpd="sng" algn="ctr">
+                      <a:solidFill>
+                        <a:srgbClr val="DCD6C9"/>
+                      </a:solidFill>
+                      <a:prstDash val="solid"/>
+                      <a:round/>
+                      <a:headEnd type="none" w="med" len="med"/>
+                      <a:tailEnd type="none" w="med" len="med"/>
+                    </a:lnR>
+                    <a:lnT w="6350" cap="flat" cmpd="sng" algn="ctr">
+                      <a:solidFill>
+                        <a:srgbClr val="DCD6C9"/>
+                      </a:solidFill>
+                      <a:prstDash val="solid"/>
+                      <a:round/>
+                      <a:headEnd type="none" w="med" len="med"/>
+                      <a:tailEnd type="none" w="med" len="med"/>
+                    </a:lnT>
+                    <a:lnB w="6350" cap="flat" cmpd="sng" algn="ctr">
+                      <a:solidFill>
+                        <a:srgbClr val="DCD6C9"/>
+                      </a:solidFill>
+                      <a:prstDash val="solid"/>
+                      <a:round/>
+                      <a:headEnd type="none" w="med" len="med"/>
+                      <a:tailEnd type="none" w="med" len="med"/>
+                    </a:lnB>
+                    <a:solidFill>
+                      <a:srgbClr val="F1EDE4"/>
+                    </a:solidFill>
+                  </a:tcPr>
+                </a:tc>
               </a:tr>
             </a:tbl>
           </a:graphicData>
@@ -9532,14 +11026,36 @@
       </p:graphicFrame>
       <p:sp>
         <p:nvSpPr>
-          <p:cNvPr id="8" name="Text 5"/>
+          <p:cNvPr id="8" name="Shape 5"/>
+          <p:cNvSpPr/>
+          <p:nvPr/>
+        </p:nvSpPr>
+        <p:spPr>
+          <a:xfrm>
+            <a:off x="640080" y="4133088"/>
+            <a:ext cx="3529584" cy="1133856"/>
+          </a:xfrm>
+          <a:prstGeom prst="roundRect">
+            <a:avLst>
+              <a:gd name="adj" fmla="val 5645"/>
+            </a:avLst>
+          </a:prstGeom>
+          <a:solidFill>
+            <a:srgbClr val="F1EDE4"/>
+          </a:solidFill>
+          <a:ln/>
+        </p:spPr>
+      </p:sp>
+      <p:sp>
+        <p:nvSpPr>
+          <p:cNvPr id="9" name="Text 6"/>
           <p:cNvSpPr txBox="1"/>
           <p:nvPr/>
         </p:nvSpPr>
         <p:spPr>
           <a:xfrm>
-            <a:off x="7223760" y="1828800"/>
-            <a:ext cx="4325112" cy="274320"/>
+            <a:off x="877824" y="4261104"/>
+            <a:ext cx="3054096" cy="274320"/>
           </a:xfrm>
           <a:prstGeom prst="rect">
             <a:avLst/>
@@ -9558,34 +11074,96 @@
               <a:buNone/>
             </a:pPr>
             <a:r>
-              <a:rPr lang="en-US" sz="1400" b="1" dirty="0">
+              <a:rPr lang="en-US" sz="1300" b="1" dirty="0">
                 <a:solidFill>
-                  <a:srgbClr val="0C2E2C"/>
+                  <a:srgbClr val="134744"/>
                 </a:solidFill>
                 <a:latin typeface="맑은 고딕" pitchFamily="34" charset="0"/>
                 <a:ea typeface="맑은 고딕" pitchFamily="34" charset="-122"/>
                 <a:cs typeface="맑은 고딕" pitchFamily="34" charset="-120"/>
               </a:rPr>
-              <a:t>글로벌 학위 · 편입 경로</a:t>
+              <a:t>복수 학위 — 랭커스터</a:t>
             </a:r>
-            <a:endParaRPr lang="en-US" sz="1400" dirty="0"/>
+            <a:endParaRPr lang="en-US" sz="1300" dirty="0"/>
           </a:p>
         </p:txBody>
       </p:sp>
       <p:sp>
         <p:nvSpPr>
-          <p:cNvPr id="9" name="Shape 6"/>
+          <p:cNvPr id="10" name="Text 7"/>
+          <p:cNvSpPr txBox="1"/>
+          <p:nvPr/>
+        </p:nvSpPr>
+        <p:spPr>
+          <a:xfrm>
+            <a:off x="877824" y="4553712"/>
+            <a:ext cx="3054096" cy="603504"/>
+          </a:xfrm>
+          <a:prstGeom prst="rect">
+            <a:avLst/>
+          </a:prstGeom>
+          <a:noFill/>
+          <a:ln/>
+        </p:spPr>
+        <p:txBody>
+          <a:bodyPr wrap="square" lIns="0" tIns="0" rIns="0" bIns="0" rtlCol="0" anchor="t"/>
+          <a:lstStyle/>
+          <a:p>
+            <a:pPr algn="l" indent="0" marL="0">
+              <a:lnSpc>
+                <a:spcPct val="140000"/>
+              </a:lnSpc>
+              <a:buNone/>
+            </a:pPr>
+            <a:r>
+              <a:rPr lang="en-US" sz="1150" dirty="0">
+                <a:solidFill>
+                  <a:srgbClr val="1B2426"/>
+                </a:solidFill>
+                <a:latin typeface="맑은 고딕" pitchFamily="34" charset="0"/>
+                <a:ea typeface="맑은 고딕" pitchFamily="34" charset="-122"/>
+                <a:cs typeface="맑은 고딕" pitchFamily="34" charset="-120"/>
+              </a:rPr>
+              <a:t>2개 학위증 · 양교 동문 자격</a:t>
+            </a:r>
+            <a:endParaRPr lang="en-US" sz="1150" dirty="0"/>
+          </a:p>
+          <a:p>
+            <a:pPr algn="l" indent="0" marL="0">
+              <a:lnSpc>
+                <a:spcPct val="140000"/>
+              </a:lnSpc>
+              <a:buNone/>
+            </a:pPr>
+            <a:r>
+              <a:rPr lang="en-US" sz="1150" dirty="0">
+                <a:solidFill>
+                  <a:srgbClr val="1B2426"/>
+                </a:solidFill>
+                <a:latin typeface="맑은 고딕" pitchFamily="34" charset="0"/>
+                <a:ea typeface="맑은 고딕" pitchFamily="34" charset="-122"/>
+                <a:cs typeface="맑은 고딕" pitchFamily="34" charset="-120"/>
+              </a:rPr>
+              <a:t>추가 비용 없이 기본 등록금에 포함</a:t>
+            </a:r>
+            <a:endParaRPr lang="en-US" sz="1150" dirty="0"/>
+          </a:p>
+        </p:txBody>
+      </p:sp>
+      <p:sp>
+        <p:nvSpPr>
+          <p:cNvPr id="11" name="Shape 8"/>
           <p:cNvSpPr/>
           <p:nvPr/>
         </p:nvSpPr>
         <p:spPr>
           <a:xfrm>
-            <a:off x="7223760" y="2194560"/>
-            <a:ext cx="4325112" cy="932688"/>
+            <a:off x="4334256" y="4133088"/>
+            <a:ext cx="3529584" cy="1133856"/>
           </a:xfrm>
           <a:prstGeom prst="roundRect">
             <a:avLst>
-              <a:gd name="adj" fmla="val 5882"/>
+              <a:gd name="adj" fmla="val 5645"/>
             </a:avLst>
           </a:prstGeom>
           <a:solidFill>
@@ -9596,14 +11174,14 @@
       </p:sp>
       <p:sp>
         <p:nvSpPr>
-          <p:cNvPr id="10" name="Text 7"/>
+          <p:cNvPr id="12" name="Text 9"/>
           <p:cNvSpPr txBox="1"/>
           <p:nvPr/>
         </p:nvSpPr>
         <p:spPr>
           <a:xfrm>
-            <a:off x="7443216" y="2286000"/>
-            <a:ext cx="3886200" cy="256032"/>
+            <a:off x="4572000" y="4261104"/>
+            <a:ext cx="3054096" cy="274320"/>
           </a:xfrm>
           <a:prstGeom prst="rect">
             <a:avLst/>
@@ -9613,6 +11191,258 @@
         </p:spPr>
         <p:txBody>
           <a:bodyPr wrap="square" lIns="0" tIns="0" rIns="0" bIns="0" rtlCol="0" anchor="t"/>
+          <a:lstStyle/>
+          <a:p>
+            <a:pPr algn="l" indent="0" marL="0">
+              <a:lnSpc>
+                <a:spcPct val="122000"/>
+              </a:lnSpc>
+              <a:buNone/>
+            </a:pPr>
+            <a:r>
+              <a:rPr lang="en-US" sz="1300" b="1" dirty="0">
+                <a:solidFill>
+                  <a:srgbClr val="134744"/>
+                </a:solidFill>
+                <a:latin typeface="맑은 고딕" pitchFamily="34" charset="0"/>
+                <a:ea typeface="맑은 고딕" pitchFamily="34" charset="-122"/>
+                <a:cs typeface="맑은 고딕" pitchFamily="34" charset="-120"/>
+              </a:rPr>
+              <a:t>미국 파트너십 — ASU</a:t>
+            </a:r>
+            <a:endParaRPr lang="en-US" sz="1300" dirty="0"/>
+          </a:p>
+        </p:txBody>
+      </p:sp>
+      <p:sp>
+        <p:nvSpPr>
+          <p:cNvPr id="13" name="Text 10"/>
+          <p:cNvSpPr txBox="1"/>
+          <p:nvPr/>
+        </p:nvSpPr>
+        <p:spPr>
+          <a:xfrm>
+            <a:off x="4572000" y="4553712"/>
+            <a:ext cx="3054096" cy="603504"/>
+          </a:xfrm>
+          <a:prstGeom prst="rect">
+            <a:avLst/>
+          </a:prstGeom>
+          <a:noFill/>
+          <a:ln/>
+        </p:spPr>
+        <p:txBody>
+          <a:bodyPr wrap="square" lIns="0" tIns="0" rIns="0" bIns="0" rtlCol="0" anchor="t"/>
+          <a:lstStyle/>
+          <a:p>
+            <a:pPr algn="l" indent="0" marL="0">
+              <a:lnSpc>
+                <a:spcPct val="140000"/>
+              </a:lnSpc>
+              <a:buNone/>
+            </a:pPr>
+            <a:r>
+              <a:rPr lang="en-US" sz="1150" dirty="0">
+                <a:solidFill>
+                  <a:srgbClr val="1B2426"/>
+                </a:solidFill>
+                <a:latin typeface="맑은 고딕" pitchFamily="34" charset="0"/>
+                <a:ea typeface="맑은 고딕" pitchFamily="34" charset="-122"/>
+                <a:cs typeface="맑은 고딕" pitchFamily="34" charset="-120"/>
+              </a:rPr>
+              <a:t>Cintana Alliance 파트너</a:t>
+            </a:r>
+            <a:endParaRPr lang="en-US" sz="1150" dirty="0"/>
+          </a:p>
+          <a:p>
+            <a:pPr algn="l" indent="0" marL="0">
+              <a:lnSpc>
+                <a:spcPct val="140000"/>
+              </a:lnSpc>
+              <a:buNone/>
+            </a:pPr>
+            <a:r>
+              <a:rPr lang="en-US" sz="1150" dirty="0">
+                <a:solidFill>
+                  <a:srgbClr val="1B2426"/>
+                </a:solidFill>
+                <a:latin typeface="맑은 고딕" pitchFamily="34" charset="0"/>
+                <a:ea typeface="맑은 고딕" pitchFamily="34" charset="-122"/>
+                <a:cs typeface="맑은 고딕" pitchFamily="34" charset="-120"/>
+              </a:rPr>
+              <a:t>20개 이상 패스웨이 · 최대 90학점 이전</a:t>
+            </a:r>
+            <a:endParaRPr lang="en-US" sz="1150" dirty="0"/>
+          </a:p>
+        </p:txBody>
+      </p:sp>
+      <p:sp>
+        <p:nvSpPr>
+          <p:cNvPr id="14" name="Shape 11"/>
+          <p:cNvSpPr/>
+          <p:nvPr/>
+        </p:nvSpPr>
+        <p:spPr>
+          <a:xfrm>
+            <a:off x="8028432" y="4133088"/>
+            <a:ext cx="3529584" cy="1133856"/>
+          </a:xfrm>
+          <a:prstGeom prst="roundRect">
+            <a:avLst>
+              <a:gd name="adj" fmla="val 5645"/>
+            </a:avLst>
+          </a:prstGeom>
+          <a:solidFill>
+            <a:srgbClr val="F1EDE4"/>
+          </a:solidFill>
+          <a:ln/>
+        </p:spPr>
+      </p:sp>
+      <p:sp>
+        <p:nvSpPr>
+          <p:cNvPr id="15" name="Text 12"/>
+          <p:cNvSpPr txBox="1"/>
+          <p:nvPr/>
+        </p:nvSpPr>
+        <p:spPr>
+          <a:xfrm>
+            <a:off x="8266176" y="4261104"/>
+            <a:ext cx="3054096" cy="274320"/>
+          </a:xfrm>
+          <a:prstGeom prst="rect">
+            <a:avLst/>
+          </a:prstGeom>
+          <a:noFill/>
+          <a:ln/>
+        </p:spPr>
+        <p:txBody>
+          <a:bodyPr wrap="square" lIns="0" tIns="0" rIns="0" bIns="0" rtlCol="0" anchor="t"/>
+          <a:lstStyle/>
+          <a:p>
+            <a:pPr algn="l" indent="0" marL="0">
+              <a:lnSpc>
+                <a:spcPct val="122000"/>
+              </a:lnSpc>
+              <a:buNone/>
+            </a:pPr>
+            <a:r>
+              <a:rPr lang="en-US" sz="1300" b="1" dirty="0">
+                <a:solidFill>
+                  <a:srgbClr val="134744"/>
+                </a:solidFill>
+                <a:latin typeface="맑은 고딕" pitchFamily="34" charset="0"/>
+                <a:ea typeface="맑은 고딕" pitchFamily="34" charset="-122"/>
+                <a:cs typeface="맑은 고딕" pitchFamily="34" charset="-120"/>
+              </a:rPr>
+              <a:t>ADTP (학점 이전)</a:t>
+            </a:r>
+            <a:endParaRPr lang="en-US" sz="1300" dirty="0"/>
+          </a:p>
+        </p:txBody>
+      </p:sp>
+      <p:sp>
+        <p:nvSpPr>
+          <p:cNvPr id="16" name="Text 13"/>
+          <p:cNvSpPr txBox="1"/>
+          <p:nvPr/>
+        </p:nvSpPr>
+        <p:spPr>
+          <a:xfrm>
+            <a:off x="8266176" y="4553712"/>
+            <a:ext cx="3054096" cy="603504"/>
+          </a:xfrm>
+          <a:prstGeom prst="rect">
+            <a:avLst/>
+          </a:prstGeom>
+          <a:noFill/>
+          <a:ln/>
+        </p:spPr>
+        <p:txBody>
+          <a:bodyPr wrap="square" lIns="0" tIns="0" rIns="0" bIns="0" rtlCol="0" anchor="t"/>
+          <a:lstStyle/>
+          <a:p>
+            <a:pPr algn="l" indent="0" marL="0">
+              <a:lnSpc>
+                <a:spcPct val="140000"/>
+              </a:lnSpc>
+              <a:buNone/>
+            </a:pPr>
+            <a:r>
+              <a:rPr lang="en-US" sz="1150" dirty="0">
+                <a:solidFill>
+                  <a:srgbClr val="1B2426"/>
+                </a:solidFill>
+                <a:latin typeface="맑은 고딕" pitchFamily="34" charset="0"/>
+                <a:ea typeface="맑은 고딕" pitchFamily="34" charset="-122"/>
+                <a:cs typeface="맑은 고딕" pitchFamily="34" charset="-120"/>
+              </a:rPr>
+              <a:t>1987년 개설 · 2,000개 이상 대학 선택</a:t>
+            </a:r>
+            <a:endParaRPr lang="en-US" sz="1150" dirty="0"/>
+          </a:p>
+          <a:p>
+            <a:pPr algn="l" indent="0" marL="0">
+              <a:lnSpc>
+                <a:spcPct val="140000"/>
+              </a:lnSpc>
+              <a:buNone/>
+            </a:pPr>
+            <a:r>
+              <a:rPr lang="en-US" sz="1150" dirty="0">
+                <a:solidFill>
+                  <a:srgbClr val="1B2426"/>
+                </a:solidFill>
+                <a:latin typeface="맑은 고딕" pitchFamily="34" charset="0"/>
+                <a:ea typeface="맑은 고딕" pitchFamily="34" charset="-122"/>
+                <a:cs typeface="맑은 고딕" pitchFamily="34" charset="-120"/>
+              </a:rPr>
+              <a:t>합격 보장 아님</a:t>
+            </a:r>
+            <a:endParaRPr lang="en-US" sz="1150" dirty="0"/>
+          </a:p>
+        </p:txBody>
+      </p:sp>
+      <p:sp>
+        <p:nvSpPr>
+          <p:cNvPr id="17" name="Shape 14"/>
+          <p:cNvSpPr/>
+          <p:nvPr/>
+        </p:nvSpPr>
+        <p:spPr>
+          <a:xfrm>
+            <a:off x="640080" y="5431536"/>
+            <a:ext cx="10911535" cy="548640"/>
+          </a:xfrm>
+          <a:prstGeom prst="roundRect">
+            <a:avLst>
+              <a:gd name="adj" fmla="val 11667"/>
+            </a:avLst>
+          </a:prstGeom>
+          <a:solidFill>
+            <a:srgbClr val="F5EEDC"/>
+          </a:solidFill>
+          <a:ln/>
+        </p:spPr>
+      </p:sp>
+      <p:sp>
+        <p:nvSpPr>
+          <p:cNvPr id="18" name="Text 15"/>
+          <p:cNvSpPr txBox="1"/>
+          <p:nvPr/>
+        </p:nvSpPr>
+        <p:spPr>
+          <a:xfrm>
+            <a:off x="896112" y="5431536"/>
+            <a:ext cx="10399471" cy="548640"/>
+          </a:xfrm>
+          <a:prstGeom prst="rect">
+            <a:avLst/>
+          </a:prstGeom>
+          <a:noFill/>
+          <a:ln/>
+        </p:spPr>
+        <p:txBody>
+          <a:bodyPr wrap="square" lIns="0" tIns="0" rIns="0" bIns="0" rtlCol="0" anchor="ctr"/>
           <a:lstStyle/>
           <a:p>
             <a:pPr algn="l" indent="0" marL="0">
@@ -9624,13 +11454,13 @@
             <a:r>
               <a:rPr lang="en-US" sz="1250" b="1" dirty="0">
                 <a:solidFill>
-                  <a:srgbClr val="134744"/>
+                  <a:srgbClr val="0C2E2C"/>
                 </a:solidFill>
                 <a:latin typeface="맑은 고딕" pitchFamily="34" charset="0"/>
                 <a:ea typeface="맑은 고딕" pitchFamily="34" charset="-122"/>
                 <a:cs typeface="맑은 고딕" pitchFamily="34" charset="-120"/>
               </a:rPr>
-              <a:t>복수 학위 — 랭커스터 대학교</a:t>
+              <a:t>선웨이의 결정적 장점 — 랭커스터 복수 학위에 추가 비용이 없습니다. 영국에 가지 않고도 영국 학위를 받고, 등록금도 더 내지 않습니다.</a:t>
             </a:r>
             <a:endParaRPr lang="en-US" sz="1250" dirty="0"/>
           </a:p>
@@ -9638,367 +11468,7 @@
       </p:sp>
       <p:sp>
         <p:nvSpPr>
-          <p:cNvPr id="11" name="Text 8"/>
-          <p:cNvSpPr txBox="1"/>
-          <p:nvPr/>
-        </p:nvSpPr>
-        <p:spPr>
-          <a:xfrm>
-            <a:off x="7443216" y="2560320"/>
-            <a:ext cx="3886200" cy="493776"/>
-          </a:xfrm>
-          <a:prstGeom prst="rect">
-            <a:avLst/>
-          </a:prstGeom>
-          <a:noFill/>
-          <a:ln/>
-        </p:spPr>
-        <p:txBody>
-          <a:bodyPr wrap="square" lIns="0" tIns="0" rIns="0" bIns="0" rtlCol="0" anchor="t"/>
-          <a:lstStyle/>
-          <a:p>
-            <a:pPr algn="l" indent="0" marL="0">
-              <a:lnSpc>
-                <a:spcPct val="135000"/>
-              </a:lnSpc>
-              <a:buNone/>
-            </a:pPr>
-            <a:r>
-              <a:rPr lang="en-US" sz="1050" dirty="0">
-                <a:solidFill>
-                  <a:srgbClr val="1B2426"/>
-                </a:solidFill>
-                <a:latin typeface="맑은 고딕" pitchFamily="34" charset="0"/>
-                <a:ea typeface="맑은 고딕" pitchFamily="34" charset="-122"/>
-                <a:cs typeface="맑은 고딕" pitchFamily="34" charset="-120"/>
-              </a:rPr>
-              <a:t>졸업 시 2개 학위증 · 양교 동문 자격. 추가 비용 없이 기본 등록금에 포함. 단 협력 프로그램(경영·컴퓨팅·심리 등)에 한함</a:t>
-            </a:r>
-            <a:endParaRPr lang="en-US" sz="1050" dirty="0"/>
-          </a:p>
-        </p:txBody>
-      </p:sp>
-      <p:sp>
-        <p:nvSpPr>
-          <p:cNvPr id="12" name="Shape 9"/>
-          <p:cNvSpPr/>
-          <p:nvPr/>
-        </p:nvSpPr>
-        <p:spPr>
-          <a:xfrm>
-            <a:off x="7223760" y="3236976"/>
-            <a:ext cx="4325112" cy="932688"/>
-          </a:xfrm>
-          <a:prstGeom prst="roundRect">
-            <a:avLst>
-              <a:gd name="adj" fmla="val 5882"/>
-            </a:avLst>
-          </a:prstGeom>
-          <a:solidFill>
-            <a:srgbClr val="F1EDE4"/>
-          </a:solidFill>
-          <a:ln/>
-        </p:spPr>
-      </p:sp>
-      <p:sp>
-        <p:nvSpPr>
-          <p:cNvPr id="13" name="Text 10"/>
-          <p:cNvSpPr txBox="1"/>
-          <p:nvPr/>
-        </p:nvSpPr>
-        <p:spPr>
-          <a:xfrm>
-            <a:off x="7443216" y="3328416"/>
-            <a:ext cx="3886200" cy="256032"/>
-          </a:xfrm>
-          <a:prstGeom prst="rect">
-            <a:avLst/>
-          </a:prstGeom>
-          <a:noFill/>
-          <a:ln/>
-        </p:spPr>
-        <p:txBody>
-          <a:bodyPr wrap="square" lIns="0" tIns="0" rIns="0" bIns="0" rtlCol="0" anchor="t"/>
-          <a:lstStyle/>
-          <a:p>
-            <a:pPr algn="l" indent="0" marL="0">
-              <a:lnSpc>
-                <a:spcPct val="122000"/>
-              </a:lnSpc>
-              <a:buNone/>
-            </a:pPr>
-            <a:r>
-              <a:rPr lang="en-US" sz="1250" b="1" dirty="0">
-                <a:solidFill>
-                  <a:srgbClr val="134744"/>
-                </a:solidFill>
-                <a:latin typeface="맑은 고딕" pitchFamily="34" charset="0"/>
-                <a:ea typeface="맑은 고딕" pitchFamily="34" charset="-122"/>
-                <a:cs typeface="맑은 고딕" pitchFamily="34" charset="-120"/>
-              </a:rPr>
-              <a:t>미국 공식 파트너십 — ASU</a:t>
-            </a:r>
-            <a:endParaRPr lang="en-US" sz="1250" dirty="0"/>
-          </a:p>
-        </p:txBody>
-      </p:sp>
-      <p:sp>
-        <p:nvSpPr>
-          <p:cNvPr id="14" name="Text 11"/>
-          <p:cNvSpPr txBox="1"/>
-          <p:nvPr/>
-        </p:nvSpPr>
-        <p:spPr>
-          <a:xfrm>
-            <a:off x="7443216" y="3602736"/>
-            <a:ext cx="3886200" cy="493776"/>
-          </a:xfrm>
-          <a:prstGeom prst="rect">
-            <a:avLst/>
-          </a:prstGeom>
-          <a:noFill/>
-          <a:ln/>
-        </p:spPr>
-        <p:txBody>
-          <a:bodyPr wrap="square" lIns="0" tIns="0" rIns="0" bIns="0" rtlCol="0" anchor="t"/>
-          <a:lstStyle/>
-          <a:p>
-            <a:pPr algn="l" indent="0" marL="0">
-              <a:lnSpc>
-                <a:spcPct val="135000"/>
-              </a:lnSpc>
-              <a:buNone/>
-            </a:pPr>
-            <a:r>
-              <a:rPr lang="en-US" sz="1050" dirty="0">
-                <a:solidFill>
-                  <a:srgbClr val="1B2426"/>
-                </a:solidFill>
-                <a:latin typeface="맑은 고딕" pitchFamily="34" charset="0"/>
-                <a:ea typeface="맑은 고딕" pitchFamily="34" charset="-122"/>
-                <a:cs typeface="맑은 고딕" pitchFamily="34" charset="-120"/>
-              </a:rPr>
-              <a:t>Cintana Alliance 파트너 · 20개 이상 패스웨이 · 최대 90학점 이전</a:t>
-            </a:r>
-            <a:endParaRPr lang="en-US" sz="1050" dirty="0"/>
-          </a:p>
-        </p:txBody>
-      </p:sp>
-      <p:sp>
-        <p:nvSpPr>
-          <p:cNvPr id="15" name="Shape 12"/>
-          <p:cNvSpPr/>
-          <p:nvPr/>
-        </p:nvSpPr>
-        <p:spPr>
-          <a:xfrm>
-            <a:off x="7223760" y="4279392"/>
-            <a:ext cx="4325112" cy="932688"/>
-          </a:xfrm>
-          <a:prstGeom prst="roundRect">
-            <a:avLst>
-              <a:gd name="adj" fmla="val 5882"/>
-            </a:avLst>
-          </a:prstGeom>
-          <a:solidFill>
-            <a:srgbClr val="F1EDE4"/>
-          </a:solidFill>
-          <a:ln/>
-        </p:spPr>
-      </p:sp>
-      <p:sp>
-        <p:nvSpPr>
-          <p:cNvPr id="16" name="Text 13"/>
-          <p:cNvSpPr txBox="1"/>
-          <p:nvPr/>
-        </p:nvSpPr>
-        <p:spPr>
-          <a:xfrm>
-            <a:off x="7443216" y="4370832"/>
-            <a:ext cx="3886200" cy="256032"/>
-          </a:xfrm>
-          <a:prstGeom prst="rect">
-            <a:avLst/>
-          </a:prstGeom>
-          <a:noFill/>
-          <a:ln/>
-        </p:spPr>
-        <p:txBody>
-          <a:bodyPr wrap="square" lIns="0" tIns="0" rIns="0" bIns="0" rtlCol="0" anchor="t"/>
-          <a:lstStyle/>
-          <a:p>
-            <a:pPr algn="l" indent="0" marL="0">
-              <a:lnSpc>
-                <a:spcPct val="122000"/>
-              </a:lnSpc>
-              <a:buNone/>
-            </a:pPr>
-            <a:r>
-              <a:rPr lang="en-US" sz="1250" b="1" dirty="0">
-                <a:solidFill>
-                  <a:srgbClr val="134744"/>
-                </a:solidFill>
-                <a:latin typeface="맑은 고딕" pitchFamily="34" charset="0"/>
-                <a:ea typeface="맑은 고딕" pitchFamily="34" charset="-122"/>
-                <a:cs typeface="맑은 고딕" pitchFamily="34" charset="-120"/>
-              </a:rPr>
-              <a:t>ADTP (학점 이전)</a:t>
-            </a:r>
-            <a:endParaRPr lang="en-US" sz="1250" dirty="0"/>
-          </a:p>
-        </p:txBody>
-      </p:sp>
-      <p:sp>
-        <p:nvSpPr>
-          <p:cNvPr id="17" name="Text 14"/>
-          <p:cNvSpPr txBox="1"/>
-          <p:nvPr/>
-        </p:nvSpPr>
-        <p:spPr>
-          <a:xfrm>
-            <a:off x="7443216" y="4645152"/>
-            <a:ext cx="3886200" cy="493776"/>
-          </a:xfrm>
-          <a:prstGeom prst="rect">
-            <a:avLst/>
-          </a:prstGeom>
-          <a:noFill/>
-          <a:ln/>
-        </p:spPr>
-        <p:txBody>
-          <a:bodyPr wrap="square" lIns="0" tIns="0" rIns="0" bIns="0" rtlCol="0" anchor="t"/>
-          <a:lstStyle/>
-          <a:p>
-            <a:pPr algn="l" indent="0" marL="0">
-              <a:lnSpc>
-                <a:spcPct val="135000"/>
-              </a:lnSpc>
-              <a:buNone/>
-            </a:pPr>
-            <a:r>
-              <a:rPr lang="en-US" sz="1050" dirty="0">
-                <a:solidFill>
-                  <a:srgbClr val="1B2426"/>
-                </a:solidFill>
-                <a:latin typeface="맑은 고딕" pitchFamily="34" charset="0"/>
-                <a:ea typeface="맑은 고딕" pitchFamily="34" charset="-122"/>
-                <a:cs typeface="맑은 고딕" pitchFamily="34" charset="-120"/>
-              </a:rPr>
-              <a:t>1987년 개설 · 2,000개 이상 대학 중 선택 가능. 합격 보장 아님</a:t>
-            </a:r>
-            <a:endParaRPr lang="en-US" sz="1050" dirty="0"/>
-          </a:p>
-        </p:txBody>
-      </p:sp>
-      <p:sp>
-        <p:nvSpPr>
-          <p:cNvPr id="18" name="Shape 15"/>
-          <p:cNvSpPr/>
-          <p:nvPr/>
-        </p:nvSpPr>
-        <p:spPr>
-          <a:xfrm>
-            <a:off x="640080" y="3931920"/>
-            <a:ext cx="6309360" cy="1371600"/>
-          </a:xfrm>
-          <a:prstGeom prst="roundRect">
-            <a:avLst>
-              <a:gd name="adj" fmla="val 4667"/>
-            </a:avLst>
-          </a:prstGeom>
-          <a:solidFill>
-            <a:srgbClr val="F5EEDC"/>
-          </a:solidFill>
-          <a:ln/>
-        </p:spPr>
-      </p:sp>
-      <p:sp>
-        <p:nvSpPr>
           <p:cNvPr id="19" name="Text 16"/>
-          <p:cNvSpPr txBox="1"/>
-          <p:nvPr/>
-        </p:nvSpPr>
-        <p:spPr>
-          <a:xfrm>
-            <a:off x="896112" y="4059936"/>
-            <a:ext cx="5797296" cy="274320"/>
-          </a:xfrm>
-          <a:prstGeom prst="rect">
-            <a:avLst/>
-          </a:prstGeom>
-          <a:noFill/>
-          <a:ln/>
-        </p:spPr>
-        <p:txBody>
-          <a:bodyPr wrap="square" lIns="0" tIns="0" rIns="0" bIns="0" rtlCol="0" anchor="t"/>
-          <a:lstStyle/>
-          <a:p>
-            <a:pPr algn="l" indent="0" marL="0">
-              <a:lnSpc>
-                <a:spcPct val="122000"/>
-              </a:lnSpc>
-              <a:buNone/>
-            </a:pPr>
-            <a:r>
-              <a:rPr lang="en-US" sz="1300" b="1" dirty="0">
-                <a:solidFill>
-                  <a:srgbClr val="C08A2E"/>
-                </a:solidFill>
-                <a:latin typeface="맑은 고딕" pitchFamily="34" charset="0"/>
-                <a:ea typeface="맑은 고딕" pitchFamily="34" charset="-122"/>
-                <a:cs typeface="맑은 고딕" pitchFamily="34" charset="-120"/>
-              </a:rPr>
-              <a:t>선웨이의 결정적 장점</a:t>
-            </a:r>
-            <a:endParaRPr lang="en-US" sz="1300" dirty="0"/>
-          </a:p>
-        </p:txBody>
-      </p:sp>
-      <p:sp>
-        <p:nvSpPr>
-          <p:cNvPr id="20" name="Text 17"/>
-          <p:cNvSpPr txBox="1"/>
-          <p:nvPr/>
-        </p:nvSpPr>
-        <p:spPr>
-          <a:xfrm>
-            <a:off x="896112" y="4370832"/>
-            <a:ext cx="5797296" cy="841248"/>
-          </a:xfrm>
-          <a:prstGeom prst="rect">
-            <a:avLst/>
-          </a:prstGeom>
-          <a:noFill/>
-          <a:ln/>
-        </p:spPr>
-        <p:txBody>
-          <a:bodyPr wrap="square" lIns="0" tIns="0" rIns="0" bIns="0" rtlCol="0" anchor="t"/>
-          <a:lstStyle/>
-          <a:p>
-            <a:pPr algn="l" indent="0" marL="0">
-              <a:lnSpc>
-                <a:spcPct val="145000"/>
-              </a:lnSpc>
-              <a:buNone/>
-            </a:pPr>
-            <a:r>
-              <a:rPr lang="en-US" sz="1250" dirty="0">
-                <a:solidFill>
-                  <a:srgbClr val="1B2426"/>
-                </a:solidFill>
-                <a:latin typeface="맑은 고딕" pitchFamily="34" charset="0"/>
-                <a:ea typeface="맑은 고딕" pitchFamily="34" charset="-122"/>
-                <a:cs typeface="맑은 고딕" pitchFamily="34" charset="-120"/>
-              </a:rPr>
-              <a:t>랭커스터 복수 학위에 추가 비용이 없습니다. 영국 학위를 받기 위해 영국에 가지 않아도 되고, 등록금도 더 내지 않습니다. 세 경로 가운데 비용 대비 효율이 가장 높은 선택입니다.</a:t>
-            </a:r>
-            <a:endParaRPr lang="en-US" sz="1250" dirty="0"/>
-          </a:p>
-        </p:txBody>
-      </p:sp>
-      <p:sp>
-        <p:nvSpPr>
-          <p:cNvPr id="21" name="Text 18"/>
           <p:cNvSpPr txBox="1"/>
           <p:nvPr/>
         </p:nvSpPr>
@@ -10023,6 +11493,17 @@
               </a:lnSpc>
               <a:buNone/>
             </a:pPr>
+            <a:r>
+              <a:rPr lang="en-US" sz="900" dirty="0">
+                <a:solidFill>
+                  <a:srgbClr val="6E7C7A"/>
+                </a:solidFill>
+                <a:latin typeface="맑은 고딕" pitchFamily="34" charset="0"/>
+                <a:ea typeface="맑은 고딕" pitchFamily="34" charset="-122"/>
+                <a:cs typeface="맑은 고딕" pitchFamily="34" charset="-120"/>
+              </a:rPr>
+              <a:t>환율 RM 1 ≈ 339원 기준 · 경영계열은 학교가 달러로 표기한 금액을 환산한 값입니다 ·  2025년 7월부터 외국인 학비에 6% 서비스세(SST)가 별도 부과됩니다</a:t>
+            </a:r>
             <a:endParaRPr lang="en-US" sz="900" dirty="0"/>
           </a:p>
         </p:txBody>

--- a/design/malaysia-study-live/IM말레이시아_입학안내문_2027_통합판.pptx
+++ b/design/malaysia-study-live/IM말레이시아_입학안내문_2027_통합판.pptx
@@ -697,7 +697,7 @@
           <a:p>
             <a:r>
               <a:rPr lang="en-US" dirty="0"/>
-              <a:t>표를 RM 기준으로 통일했습니다. 약학 학비는 학교 요금표에서 받아 채워 넣으십시오. 공대·약대 지망자는 5년 행을 보여 주는 것이 정확합니다.</a:t>
+              <a:t>표를 RM 기준으로 통일했습니다. 공대 지망자는 5년 행을 보여 주는 것이 정확합니다.</a:t>
             </a:r>
             <a:endParaRPr lang="en-US" dirty="0"/>
           </a:p>
@@ -6253,348 +6253,6 @@
                           <a:ea typeface="맑은 고딕" pitchFamily="34" charset="-122"/>
                           <a:cs typeface="맑은 고딕" pitchFamily="34" charset="-120"/>
                         </a:rPr>
-                        <a:t>약학</a:t>
-                      </a:r>
-                      <a:endParaRPr lang="en-US" sz="1250" dirty="0">
-                        <a:latin typeface="맑은 고딕" charset="0"/>
-                        <a:ea typeface="맑은 고딕" charset="0"/>
-                        <a:cs typeface="맑은 고딕" charset="0"/>
-                      </a:endParaRPr>
-                    </a:p>
-                  </a:txBody>
-                  <a:tcPr marL="88900" marR="88900" marT="50800" marB="50800" anchor="ctr">
-                    <a:lnL w="6350" cap="flat" cmpd="sng" algn="ctr">
-                      <a:solidFill>
-                        <a:srgbClr val="DCD6C9"/>
-                      </a:solidFill>
-                      <a:prstDash val="solid"/>
-                      <a:round/>
-                      <a:headEnd type="none" w="med" len="med"/>
-                      <a:tailEnd type="none" w="med" len="med"/>
-                    </a:lnL>
-                    <a:lnR w="6350" cap="flat" cmpd="sng" algn="ctr">
-                      <a:solidFill>
-                        <a:srgbClr val="DCD6C9"/>
-                      </a:solidFill>
-                      <a:prstDash val="solid"/>
-                      <a:round/>
-                      <a:headEnd type="none" w="med" len="med"/>
-                      <a:tailEnd type="none" w="med" len="med"/>
-                    </a:lnR>
-                    <a:lnT w="6350" cap="flat" cmpd="sng" algn="ctr">
-                      <a:solidFill>
-                        <a:srgbClr val="DCD6C9"/>
-                      </a:solidFill>
-                      <a:prstDash val="solid"/>
-                      <a:round/>
-                      <a:headEnd type="none" w="med" len="med"/>
-                      <a:tailEnd type="none" w="med" len="med"/>
-                    </a:lnT>
-                    <a:lnB w="6350" cap="flat" cmpd="sng" algn="ctr">
-                      <a:solidFill>
-                        <a:srgbClr val="DCD6C9"/>
-                      </a:solidFill>
-                      <a:prstDash val="solid"/>
-                      <a:round/>
-                      <a:headEnd type="none" w="med" len="med"/>
-                      <a:tailEnd type="none" w="med" len="med"/>
-                    </a:lnB>
-                    <a:solidFill>
-                      <a:srgbClr val="F1EDE4"/>
-                    </a:solidFill>
-                  </a:tcPr>
-                </a:tc>
-                <a:tc>
-                  <a:txBody>
-                    <a:bodyPr/>
-                    <a:lstStyle/>
-                    <a:p>
-                      <a:pPr indent="0" marL="0">
-                        <a:buNone/>
-                      </a:pPr>
-                      <a:r>
-                        <a:rPr lang="en-US" sz="1250" dirty="0">
-                          <a:solidFill>
-                            <a:srgbClr val="1B2426"/>
-                          </a:solidFill>
-                          <a:latin typeface="맑은 고딕" pitchFamily="34" charset="0"/>
-                          <a:ea typeface="맑은 고딕" pitchFamily="34" charset="-122"/>
-                          <a:cs typeface="맑은 고딕" pitchFamily="34" charset="-120"/>
-                        </a:rPr>
-                        <a:t>4년</a:t>
-                      </a:r>
-                      <a:endParaRPr lang="en-US" sz="1250" dirty="0">
-                        <a:latin typeface="맑은 고딕" charset="0"/>
-                        <a:ea typeface="맑은 고딕" charset="0"/>
-                        <a:cs typeface="맑은 고딕" charset="0"/>
-                      </a:endParaRPr>
-                    </a:p>
-                  </a:txBody>
-                  <a:tcPr marL="88900" marR="88900" marT="50800" marB="50800" anchor="ctr">
-                    <a:lnL w="6350" cap="flat" cmpd="sng" algn="ctr">
-                      <a:solidFill>
-                        <a:srgbClr val="DCD6C9"/>
-                      </a:solidFill>
-                      <a:prstDash val="solid"/>
-                      <a:round/>
-                      <a:headEnd type="none" w="med" len="med"/>
-                      <a:tailEnd type="none" w="med" len="med"/>
-                    </a:lnL>
-                    <a:lnR w="6350" cap="flat" cmpd="sng" algn="ctr">
-                      <a:solidFill>
-                        <a:srgbClr val="DCD6C9"/>
-                      </a:solidFill>
-                      <a:prstDash val="solid"/>
-                      <a:round/>
-                      <a:headEnd type="none" w="med" len="med"/>
-                      <a:tailEnd type="none" w="med" len="med"/>
-                    </a:lnR>
-                    <a:lnT w="6350" cap="flat" cmpd="sng" algn="ctr">
-                      <a:solidFill>
-                        <a:srgbClr val="DCD6C9"/>
-                      </a:solidFill>
-                      <a:prstDash val="solid"/>
-                      <a:round/>
-                      <a:headEnd type="none" w="med" len="med"/>
-                      <a:tailEnd type="none" w="med" len="med"/>
-                    </a:lnT>
-                    <a:lnB w="6350" cap="flat" cmpd="sng" algn="ctr">
-                      <a:solidFill>
-                        <a:srgbClr val="DCD6C9"/>
-                      </a:solidFill>
-                      <a:prstDash val="solid"/>
-                      <a:round/>
-                      <a:headEnd type="none" w="med" len="med"/>
-                      <a:tailEnd type="none" w="med" len="med"/>
-                    </a:lnB>
-                    <a:solidFill>
-                      <a:srgbClr val="F1EDE4"/>
-                    </a:solidFill>
-                  </a:tcPr>
-                </a:tc>
-                <a:tc>
-                  <a:txBody>
-                    <a:bodyPr/>
-                    <a:lstStyle/>
-                    <a:p>
-                      <a:pPr indent="0" marL="0">
-                        <a:buNone/>
-                      </a:pPr>
-                      <a:r>
-                        <a:rPr lang="en-US" sz="1250" dirty="0">
-                          <a:solidFill>
-                            <a:srgbClr val="1B2426"/>
-                          </a:solidFill>
-                          <a:latin typeface="맑은 고딕" pitchFamily="34" charset="0"/>
-                          <a:ea typeface="맑은 고딕" pitchFamily="34" charset="-122"/>
-                          <a:cs typeface="맑은 고딕" pitchFamily="34" charset="-120"/>
-                        </a:rPr>
-                        <a:t>[학교 확인 후 기입]</a:t>
-                      </a:r>
-                      <a:endParaRPr lang="en-US" sz="1250" dirty="0">
-                        <a:latin typeface="맑은 고딕" charset="0"/>
-                        <a:ea typeface="맑은 고딕" charset="0"/>
-                        <a:cs typeface="맑은 고딕" charset="0"/>
-                      </a:endParaRPr>
-                    </a:p>
-                  </a:txBody>
-                  <a:tcPr marL="88900" marR="88900" marT="50800" marB="50800" anchor="ctr">
-                    <a:lnL w="6350" cap="flat" cmpd="sng" algn="ctr">
-                      <a:solidFill>
-                        <a:srgbClr val="DCD6C9"/>
-                      </a:solidFill>
-                      <a:prstDash val="solid"/>
-                      <a:round/>
-                      <a:headEnd type="none" w="med" len="med"/>
-                      <a:tailEnd type="none" w="med" len="med"/>
-                    </a:lnL>
-                    <a:lnR w="6350" cap="flat" cmpd="sng" algn="ctr">
-                      <a:solidFill>
-                        <a:srgbClr val="DCD6C9"/>
-                      </a:solidFill>
-                      <a:prstDash val="solid"/>
-                      <a:round/>
-                      <a:headEnd type="none" w="med" len="med"/>
-                      <a:tailEnd type="none" w="med" len="med"/>
-                    </a:lnR>
-                    <a:lnT w="6350" cap="flat" cmpd="sng" algn="ctr">
-                      <a:solidFill>
-                        <a:srgbClr val="DCD6C9"/>
-                      </a:solidFill>
-                      <a:prstDash val="solid"/>
-                      <a:round/>
-                      <a:headEnd type="none" w="med" len="med"/>
-                      <a:tailEnd type="none" w="med" len="med"/>
-                    </a:lnT>
-                    <a:lnB w="6350" cap="flat" cmpd="sng" algn="ctr">
-                      <a:solidFill>
-                        <a:srgbClr val="DCD6C9"/>
-                      </a:solidFill>
-                      <a:prstDash val="solid"/>
-                      <a:round/>
-                      <a:headEnd type="none" w="med" len="med"/>
-                      <a:tailEnd type="none" w="med" len="med"/>
-                    </a:lnB>
-                    <a:solidFill>
-                      <a:srgbClr val="F1EDE4"/>
-                    </a:solidFill>
-                  </a:tcPr>
-                </a:tc>
-                <a:tc>
-                  <a:txBody>
-                    <a:bodyPr/>
-                    <a:lstStyle/>
-                    <a:p>
-                      <a:pPr indent="0" marL="0">
-                        <a:buNone/>
-                      </a:pPr>
-                      <a:r>
-                        <a:rPr lang="en-US" sz="1250" dirty="0">
-                          <a:solidFill>
-                            <a:srgbClr val="1B2426"/>
-                          </a:solidFill>
-                          <a:latin typeface="맑은 고딕" pitchFamily="34" charset="0"/>
-                          <a:ea typeface="맑은 고딕" pitchFamily="34" charset="-122"/>
-                          <a:cs typeface="맑은 고딕" pitchFamily="34" charset="-120"/>
-                        </a:rPr>
-                        <a:t>—</a:t>
-                      </a:r>
-                      <a:endParaRPr lang="en-US" sz="1250" dirty="0">
-                        <a:latin typeface="맑은 고딕" charset="0"/>
-                        <a:ea typeface="맑은 고딕" charset="0"/>
-                        <a:cs typeface="맑은 고딕" charset="0"/>
-                      </a:endParaRPr>
-                    </a:p>
-                  </a:txBody>
-                  <a:tcPr marL="88900" marR="88900" marT="50800" marB="50800" anchor="ctr">
-                    <a:lnL w="6350" cap="flat" cmpd="sng" algn="ctr">
-                      <a:solidFill>
-                        <a:srgbClr val="DCD6C9"/>
-                      </a:solidFill>
-                      <a:prstDash val="solid"/>
-                      <a:round/>
-                      <a:headEnd type="none" w="med" len="med"/>
-                      <a:tailEnd type="none" w="med" len="med"/>
-                    </a:lnL>
-                    <a:lnR w="6350" cap="flat" cmpd="sng" algn="ctr">
-                      <a:solidFill>
-                        <a:srgbClr val="DCD6C9"/>
-                      </a:solidFill>
-                      <a:prstDash val="solid"/>
-                      <a:round/>
-                      <a:headEnd type="none" w="med" len="med"/>
-                      <a:tailEnd type="none" w="med" len="med"/>
-                    </a:lnR>
-                    <a:lnT w="6350" cap="flat" cmpd="sng" algn="ctr">
-                      <a:solidFill>
-                        <a:srgbClr val="DCD6C9"/>
-                      </a:solidFill>
-                      <a:prstDash val="solid"/>
-                      <a:round/>
-                      <a:headEnd type="none" w="med" len="med"/>
-                      <a:tailEnd type="none" w="med" len="med"/>
-                    </a:lnT>
-                    <a:lnB w="6350" cap="flat" cmpd="sng" algn="ctr">
-                      <a:solidFill>
-                        <a:srgbClr val="DCD6C9"/>
-                      </a:solidFill>
-                      <a:prstDash val="solid"/>
-                      <a:round/>
-                      <a:headEnd type="none" w="med" len="med"/>
-                      <a:tailEnd type="none" w="med" len="med"/>
-                    </a:lnB>
-                    <a:solidFill>
-                      <a:srgbClr val="F1EDE4"/>
-                    </a:solidFill>
-                  </a:tcPr>
-                </a:tc>
-                <a:tc>
-                  <a:txBody>
-                    <a:bodyPr/>
-                    <a:lstStyle/>
-                    <a:p>
-                      <a:pPr indent="0" marL="0">
-                        <a:buNone/>
-                      </a:pPr>
-                      <a:r>
-                        <a:rPr lang="en-US" sz="1250" dirty="0">
-                          <a:solidFill>
-                            <a:srgbClr val="1B2426"/>
-                          </a:solidFill>
-                          <a:latin typeface="맑은 고딕" pitchFamily="34" charset="0"/>
-                          <a:ea typeface="맑은 고딕" pitchFamily="34" charset="-122"/>
-                          <a:cs typeface="맑은 고딕" pitchFamily="34" charset="-120"/>
-                        </a:rPr>
-                        <a:t>—</a:t>
-                      </a:r>
-                      <a:endParaRPr lang="en-US" sz="1250" dirty="0">
-                        <a:latin typeface="맑은 고딕" charset="0"/>
-                        <a:ea typeface="맑은 고딕" charset="0"/>
-                        <a:cs typeface="맑은 고딕" charset="0"/>
-                      </a:endParaRPr>
-                    </a:p>
-                  </a:txBody>
-                  <a:tcPr marL="88900" marR="88900" marT="50800" marB="50800" anchor="ctr">
-                    <a:lnL w="6350" cap="flat" cmpd="sng" algn="ctr">
-                      <a:solidFill>
-                        <a:srgbClr val="DCD6C9"/>
-                      </a:solidFill>
-                      <a:prstDash val="solid"/>
-                      <a:round/>
-                      <a:headEnd type="none" w="med" len="med"/>
-                      <a:tailEnd type="none" w="med" len="med"/>
-                    </a:lnL>
-                    <a:lnR w="6350" cap="flat" cmpd="sng" algn="ctr">
-                      <a:solidFill>
-                        <a:srgbClr val="DCD6C9"/>
-                      </a:solidFill>
-                      <a:prstDash val="solid"/>
-                      <a:round/>
-                      <a:headEnd type="none" w="med" len="med"/>
-                      <a:tailEnd type="none" w="med" len="med"/>
-                    </a:lnR>
-                    <a:lnT w="6350" cap="flat" cmpd="sng" algn="ctr">
-                      <a:solidFill>
-                        <a:srgbClr val="DCD6C9"/>
-                      </a:solidFill>
-                      <a:prstDash val="solid"/>
-                      <a:round/>
-                      <a:headEnd type="none" w="med" len="med"/>
-                      <a:tailEnd type="none" w="med" len="med"/>
-                    </a:lnT>
-                    <a:lnB w="6350" cap="flat" cmpd="sng" algn="ctr">
-                      <a:solidFill>
-                        <a:srgbClr val="DCD6C9"/>
-                      </a:solidFill>
-                      <a:prstDash val="solid"/>
-                      <a:round/>
-                      <a:headEnd type="none" w="med" len="med"/>
-                      <a:tailEnd type="none" w="med" len="med"/>
-                    </a:lnB>
-                    <a:solidFill>
-                      <a:srgbClr val="F1EDE4"/>
-                    </a:solidFill>
-                  </a:tcPr>
-                </a:tc>
-              </a:tr>
-              <a:tr h="438912">
-                <a:tc>
-                  <a:txBody>
-                    <a:bodyPr/>
-                    <a:lstStyle/>
-                    <a:p>
-                      <a:pPr indent="0" marL="0">
-                        <a:buNone/>
-                      </a:pPr>
-                      <a:r>
-                        <a:rPr lang="en-US" sz="1250" dirty="0">
-                          <a:solidFill>
-                            <a:srgbClr val="1B2426"/>
-                          </a:solidFill>
-                          <a:latin typeface="맑은 고딕" pitchFamily="34" charset="0"/>
-                          <a:ea typeface="맑은 고딕" pitchFamily="34" charset="-122"/>
-                          <a:cs typeface="맑은 고딕" pitchFamily="34" charset="-120"/>
-                        </a:rPr>
                         <a:t>파운데이션 + 기계공학</a:t>
                       </a:r>
                       <a:endParaRPr lang="en-US" sz="1250" dirty="0">
@@ -6642,7 +6300,7 @@
                       <a:tailEnd type="none" w="med" len="med"/>
                     </a:lnB>
                     <a:solidFill>
-                      <a:srgbClr val="FFFFFF"/>
+                      <a:srgbClr val="F1EDE4"/>
                     </a:solidFill>
                   </a:tcPr>
                 </a:tc>
@@ -6710,7 +6368,7 @@
                       <a:tailEnd type="none" w="med" len="med"/>
                     </a:lnB>
                     <a:solidFill>
-                      <a:srgbClr val="FFFFFF"/>
+                      <a:srgbClr val="F1EDE4"/>
                     </a:solidFill>
                   </a:tcPr>
                 </a:tc>
@@ -6778,7 +6436,7 @@
                       <a:tailEnd type="none" w="med" len="med"/>
                     </a:lnB>
                     <a:solidFill>
-                      <a:srgbClr val="FFFFFF"/>
+                      <a:srgbClr val="F1EDE4"/>
                     </a:solidFill>
                   </a:tcPr>
                 </a:tc>
@@ -6846,7 +6504,7 @@
                       <a:tailEnd type="none" w="med" len="med"/>
                     </a:lnB>
                     <a:solidFill>
-                      <a:srgbClr val="FFFFFF"/>
+                      <a:srgbClr val="F1EDE4"/>
                     </a:solidFill>
                   </a:tcPr>
                 </a:tc>
@@ -6914,7 +6572,7 @@
                       <a:tailEnd type="none" w="med" len="med"/>
                     </a:lnB>
                     <a:solidFill>
-                      <a:srgbClr val="FFFFFF"/>
+                      <a:srgbClr val="F1EDE4"/>
                     </a:solidFill>
                   </a:tcPr>
                 </a:tc>

--- a/design/malaysia-study-live/IM말레이시아_입학안내문_2027_통합판.pptx
+++ b/design/malaysia-study-live/IM말레이시아_입학안내문_2027_통합판.pptx
@@ -873,7 +873,7 @@
           <a:p>
             <a:r>
               <a:rPr lang="en-US" dirty="0"/>
-              <a:t>선웨이 경영계열만 학교가 달러로 표기합니다. 환산값임을 밝혀 두었습니다. 공대 지망자는 5년 행이 실제 예산입니다.</a:t>
+              <a:t>경영계열 달러 금액은 입학처에서 받은 수치입니다. 청구 시 적용 환율만 확인하면 확정됩니다. 공대 지망자는 5년 행이 실제 예산입니다.</a:t>
             </a:r>
             <a:endParaRPr lang="en-US" dirty="0"/>
           </a:p>
@@ -11160,7 +11160,7 @@
                 <a:ea typeface="맑은 고딕" pitchFamily="34" charset="-122"/>
                 <a:cs typeface="맑은 고딕" pitchFamily="34" charset="-120"/>
               </a:rPr>
-              <a:t>환율 RM 1 ≈ 339원 기준 · 경영계열은 학교가 달러로 표기한 금액을 환산한 값입니다 ·  2025년 7월부터 외국인 학비에 6% 서비스세(SST)가 별도 부과됩니다</a:t>
+              <a:t>환율 RM 1 ≈ 339원 기준 · 경영계열은 입학처가 달러로 안내한 금액(연 USD 6,820~9,091)을 환산한 값 — 청구 시 적용 환율은 입학처 확인 ·  2025년 7월부터 외국인 학비에 6% 서비스세(SST) 별도 부과</a:t>
             </a:r>
             <a:endParaRPr lang="en-US" sz="900" dirty="0"/>
           </a:p>
